--- a/session4/session4_full.pptx
+++ b/session4/session4_full.pptx
@@ -6,6 +6,7 @@
   </p:sldMasterIdLst>
   <p:sldIdLst>
     <p:sldId id="256" r:id="rId2"/>
+    <p:sldId id="268" r:id="rId19"/>
     <p:sldId id="257" r:id="rId3"/>
     <p:sldId id="258" r:id="rId4"/>
     <p:sldId id="259" r:id="rId5"/>
@@ -2021,6 +2022,10 @@
             <a:prstDash val="solid"/>
           </a:ln>
         </p:spPr>
+        <p:txBody>
+          <a:bodyPr/>
+          <a:p/>
+        </p:txBody>
       </p:sp>
       <p:sp>
         <p:nvSpPr>
@@ -2175,6 +2180,39 @@
               <a:t>Koji</a:t>
             </a:r>
             <a:endParaRPr lang="en-US" sz="1100" dirty="0"/>
+          </a:p>
+        </p:txBody>
+      </p:sp>
+      <p:sp>
+        <p:nvSpPr>
+          <p:cNvPr id="11" name="TextBox 10"/>
+          <p:cNvSpPr txBox="1"/>
+          <p:nvPr/>
+        </p:nvSpPr>
+        <p:spPr>
+          <a:xfrm>
+            <a:off x="457200" y="4280000"/>
+            <a:ext cx="8229600" cy="290000"/>
+          </a:xfrm>
+          <a:prstGeom prst="rect">
+            <a:avLst/>
+          </a:prstGeom>
+          <a:noFill/>
+        </p:spPr>
+        <p:txBody>
+          <a:bodyPr wrap="square" lIns="0" rIns="0" tIns="0" bIns="0">
+            <a:spAutoFit/>
+          </a:bodyPr>
+          <a:lstStyle/>
+          <a:p>
+            <a:r>
+              <a:rPr sz="1500" b="1">
+                <a:solidFill>
+                  <a:srgbClr val="FFC800"/>
+                </a:solidFill>
+              </a:rPr>
+              <a:t>★ 覚えて帰る一言: 「繰り返し作業はSkillにする」</a:t>
+            </a:r>
           </a:p>
         </p:txBody>
       </p:sp>
@@ -2187,6 +2225,1222 @@
 </file>
 
 <file path=ppt/slides/slide10.xml><?xml version="1.0" encoding="utf-8"?>
+<p:sld xmlns:a="http://schemas.openxmlformats.org/drawingml/2006/main" xmlns:r="http://schemas.openxmlformats.org/officeDocument/2006/relationships" xmlns:p="http://schemas.openxmlformats.org/presentationml/2006/main">
+  <p:cSld name="Slide 9">
+    <p:bg>
+      <p:bgPr>
+        <a:solidFill>
+          <a:srgbClr val="FFFFFF"/>
+        </a:solidFill>
+      </p:bgPr>
+    </p:bg>
+    <p:spTree>
+      <p:nvGrpSpPr>
+        <p:cNvPr id="1" name=""/>
+        <p:cNvGrpSpPr/>
+        <p:nvPr/>
+      </p:nvGrpSpPr>
+      <p:grpSpPr>
+        <a:xfrm>
+          <a:off x="0" y="0"/>
+          <a:ext cx="0" cy="0"/>
+          <a:chOff x="0" y="0"/>
+          <a:chExt cx="0" cy="0"/>
+        </a:xfrm>
+      </p:grpSpPr>
+      <p:sp>
+        <p:nvSpPr>
+          <p:cNvPr id="2" name="Text 0"/>
+          <p:cNvSpPr/>
+          <p:nvPr/>
+        </p:nvSpPr>
+        <p:spPr>
+          <a:xfrm>
+            <a:off x="457200" y="320040"/>
+            <a:ext cx="8229600" cy="548640"/>
+          </a:xfrm>
+          <a:prstGeom prst="rect">
+            <a:avLst/>
+          </a:prstGeom>
+          <a:noFill/>
+          <a:ln/>
+        </p:spPr>
+        <p:txBody>
+          <a:bodyPr wrap="square" lIns="0" tIns="0" rIns="0" bIns="0" rtlCol="0" anchor="ctr"/>
+          <a:lstStyle/>
+          <a:p>
+            <a:pPr indent="0" marL="0">
+              <a:buNone/>
+            </a:pPr>
+            <a:r>
+              <a:rPr lang="en-US" sz="2000" b="1" dirty="0">
+                <a:solidFill>
+                  <a:srgbClr val="1E2761"/>
+                </a:solidFill>
+                <a:latin typeface="Arial Black" pitchFamily="34" charset="0"/>
+                <a:ea typeface="Arial Black" pitchFamily="34" charset="-122"/>
+                <a:cs typeface="Arial Black" pitchFamily="34" charset="-120"/>
+              </a:rPr>
+              <a:t>コンテキストエンジニアリング ― 戦略3: サブエージェント</a:t>
+            </a:r>
+            <a:endParaRPr lang="en-US" sz="2000" dirty="0"/>
+          </a:p>
+        </p:txBody>
+      </p:sp>
+      <p:sp>
+        <p:nvSpPr>
+          <p:cNvPr id="3" name="Shape 1"/>
+          <p:cNvSpPr/>
+          <p:nvPr/>
+        </p:nvSpPr>
+        <p:spPr>
+          <a:xfrm>
+            <a:off x="457200" y="932688"/>
+            <a:ext cx="548640" cy="45720"/>
+          </a:xfrm>
+          <a:prstGeom prst="rect">
+            <a:avLst/>
+          </a:prstGeom>
+          <a:solidFill>
+            <a:srgbClr val="F96167"/>
+          </a:solidFill>
+          <a:ln w="12700">
+            <a:solidFill>
+              <a:srgbClr val="F96167"/>
+            </a:solidFill>
+            <a:prstDash val="solid"/>
+          </a:ln>
+        </p:spPr>
+        <p:txBody>
+          <a:bodyPr/>
+          <a:p/>
+        </p:txBody>
+      </p:sp>
+      <p:sp>
+        <p:nvSpPr>
+          <p:cNvPr id="4" name="Text 2"/>
+          <p:cNvSpPr/>
+          <p:nvPr/>
+        </p:nvSpPr>
+        <p:spPr>
+          <a:xfrm>
+            <a:off x="457200" y="1051560"/>
+            <a:ext cx="8229600" cy="274320"/>
+          </a:xfrm>
+          <a:prstGeom prst="rect">
+            <a:avLst/>
+          </a:prstGeom>
+          <a:noFill/>
+          <a:ln/>
+        </p:spPr>
+        <p:txBody>
+          <a:bodyPr wrap="square" lIns="0" tIns="0" rIns="0" bIns="0" rtlCol="0" anchor="ctr"/>
+          <a:lstStyle/>
+          <a:p>
+            <a:pPr indent="0" marL="0">
+              <a:buNone/>
+            </a:pPr>
+            <a:r>
+              <a:rPr lang="en-US" sz="1300" i="1" dirty="0">
+                <a:solidFill>
+                  <a:srgbClr val="64748B"/>
+                </a:solidFill>
+                <a:latin typeface="Meiryo" pitchFamily="34" charset="0"/>
+                <a:ea typeface="Meiryo" pitchFamily="34" charset="-122"/>
+                <a:cs typeface="Meiryo" pitchFamily="34" charset="-120"/>
+              </a:rPr>
+              <a:t>独立したコンテキストウィンドウで並列作業。親の文脈を汚さない</a:t>
+            </a:r>
+            <a:endParaRPr lang="en-US" sz="1300" dirty="0"/>
+          </a:p>
+        </p:txBody>
+      </p:sp>
+      <p:sp>
+        <p:nvSpPr>
+          <p:cNvPr id="5" name="Shape 3"/>
+          <p:cNvSpPr/>
+          <p:nvPr/>
+        </p:nvSpPr>
+        <p:spPr>
+          <a:xfrm>
+            <a:off x="457200" y="1417320"/>
+            <a:ext cx="3931920" cy="2834640"/>
+          </a:xfrm>
+          <a:prstGeom prst="rect">
+            <a:avLst/>
+          </a:prstGeom>
+          <a:solidFill>
+            <a:srgbClr val="F8F9FC"/>
+          </a:solidFill>
+          <a:ln w="9525">
+            <a:solidFill>
+              <a:srgbClr val="E5E9F2"/>
+            </a:solidFill>
+            <a:prstDash val="solid"/>
+          </a:ln>
+        </p:spPr>
+        <p:txBody>
+          <a:bodyPr/>
+          <a:p/>
+        </p:txBody>
+      </p:sp>
+      <p:sp>
+        <p:nvSpPr>
+          <p:cNvPr id="6" name="Shape 4"/>
+          <p:cNvSpPr/>
+          <p:nvPr/>
+        </p:nvSpPr>
+        <p:spPr>
+          <a:xfrm>
+            <a:off x="457200" y="1417320"/>
+            <a:ext cx="3931920" cy="73152"/>
+          </a:xfrm>
+          <a:prstGeom prst="rect">
+            <a:avLst/>
+          </a:prstGeom>
+          <a:solidFill>
+            <a:srgbClr val="1E2761"/>
+          </a:solidFill>
+          <a:ln w="12700">
+            <a:solidFill>
+              <a:srgbClr val="1E2761"/>
+            </a:solidFill>
+            <a:prstDash val="solid"/>
+          </a:ln>
+        </p:spPr>
+        <p:txBody>
+          <a:bodyPr/>
+          <a:p/>
+        </p:txBody>
+      </p:sp>
+      <p:sp>
+        <p:nvSpPr>
+          <p:cNvPr id="7" name="Text 5"/>
+          <p:cNvSpPr/>
+          <p:nvPr/>
+        </p:nvSpPr>
+        <p:spPr>
+          <a:xfrm>
+            <a:off x="640080" y="1600200"/>
+            <a:ext cx="3566160" cy="320040"/>
+          </a:xfrm>
+          <a:prstGeom prst="rect">
+            <a:avLst/>
+          </a:prstGeom>
+          <a:noFill/>
+          <a:ln/>
+        </p:spPr>
+        <p:txBody>
+          <a:bodyPr wrap="square" lIns="0" tIns="0" rIns="0" bIns="0" rtlCol="0" anchor="ctr"/>
+          <a:lstStyle/>
+          <a:p>
+            <a:pPr indent="0" marL="0">
+              <a:buNone/>
+            </a:pPr>
+            <a:r>
+              <a:rPr lang="en-US" sz="1400" b="1" dirty="0">
+                <a:solidFill>
+                  <a:srgbClr val="1E2761"/>
+                </a:solidFill>
+                <a:latin typeface="Meiryo" pitchFamily="34" charset="0"/>
+                <a:ea typeface="Meiryo" pitchFamily="34" charset="-122"/>
+                <a:cs typeface="Meiryo" pitchFamily="34" charset="-120"/>
+              </a:rPr>
+              <a:t>仕組みと利点</a:t>
+            </a:r>
+            <a:endParaRPr lang="en-US" sz="1400" dirty="0"/>
+          </a:p>
+        </p:txBody>
+      </p:sp>
+      <p:sp>
+        <p:nvSpPr>
+          <p:cNvPr id="8" name="Text 6"/>
+          <p:cNvSpPr/>
+          <p:nvPr/>
+        </p:nvSpPr>
+        <p:spPr>
+          <a:xfrm>
+            <a:off x="640080" y="2011680"/>
+            <a:ext cx="3566160" cy="1371600"/>
+          </a:xfrm>
+          <a:prstGeom prst="rect">
+            <a:avLst/>
+          </a:prstGeom>
+          <a:noFill/>
+          <a:ln/>
+        </p:spPr>
+        <p:txBody>
+          <a:bodyPr wrap="square" lIns="0" tIns="0" rIns="0" bIns="0" rtlCol="0" anchor="t"/>
+          <a:lstStyle/>
+          <a:p>
+            <a:pPr marL="342900" indent="-342900">
+              <a:spcAft>
+                <a:spcPts val="600"/>
+              </a:spcAft>
+              <a:buSzPct val="100000"/>
+              <a:buChar char="■"/>
+            </a:pPr>
+            <a:r>
+              <a:rPr lang="en-US" sz="1100" dirty="0">
+                <a:solidFill>
+                  <a:srgbClr val="2D3748"/>
+                </a:solidFill>
+                <a:latin typeface="Meiryo" pitchFamily="34" charset="0"/>
+                <a:ea typeface="Meiryo" pitchFamily="34" charset="-122"/>
+                <a:cs typeface="Meiryo" pitchFamily="34" charset="-120"/>
+              </a:rPr>
+              <a:t>独立したコンテキストウィンドウで動作</a:t>
+            </a:r>
+            <a:endParaRPr lang="en-US" sz="1100" dirty="0"/>
+          </a:p>
+          <a:p>
+            <a:pPr marL="342900" indent="-342900">
+              <a:spcAft>
+                <a:spcPts val="600"/>
+              </a:spcAft>
+              <a:buSzPct val="100000"/>
+              <a:buChar char="■"/>
+            </a:pPr>
+            <a:r>
+              <a:rPr lang="en-US" sz="1100" dirty="0">
+                <a:solidFill>
+                  <a:srgbClr val="2D3748"/>
+                </a:solidFill>
+                <a:latin typeface="Meiryo" pitchFamily="34" charset="0"/>
+                <a:ea typeface="Meiryo" pitchFamily="34" charset="-122"/>
+                <a:cs typeface="Meiryo" pitchFamily="34" charset="-120"/>
+              </a:rPr>
+              <a:t>親エージェントのコンテキストに影響しない</a:t>
+            </a:r>
+            <a:endParaRPr lang="en-US" sz="1100" dirty="0"/>
+          </a:p>
+          <a:p>
+            <a:pPr marL="342900" indent="-342900">
+              <a:spcAft>
+                <a:spcPts val="600"/>
+              </a:spcAft>
+              <a:buSzPct val="100000"/>
+              <a:buChar char="■"/>
+            </a:pPr>
+            <a:r>
+              <a:rPr lang="en-US" sz="1100" dirty="0">
+                <a:solidFill>
+                  <a:srgbClr val="2D3748"/>
+                </a:solidFill>
+                <a:latin typeface="Meiryo" pitchFamily="34" charset="0"/>
+                <a:ea typeface="Meiryo" pitchFamily="34" charset="-122"/>
+                <a:cs typeface="Meiryo" pitchFamily="34" charset="-120"/>
+              </a:rPr>
+              <a:t>結果はファイル経由で親にレポート</a:t>
+            </a:r>
+            <a:endParaRPr lang="en-US" sz="1100" dirty="0"/>
+          </a:p>
+          <a:p>
+            <a:pPr marL="342900" indent="-342900">
+              <a:spcAft>
+                <a:spcPts val="600"/>
+              </a:spcAft>
+              <a:buSzPct val="100000"/>
+              <a:buChar char="■"/>
+            </a:pPr>
+            <a:r>
+              <a:rPr lang="en-US" sz="1100" dirty="0">
+                <a:solidFill>
+                  <a:srgbClr val="2D3748"/>
+                </a:solidFill>
+                <a:latin typeface="Meiryo" pitchFamily="34" charset="0"/>
+                <a:ea typeface="Meiryo" pitchFamily="34" charset="-122"/>
+                <a:cs typeface="Meiryo" pitchFamily="34" charset="-120"/>
+              </a:rPr>
+              <a:t>⚠ 実行単位でコンテキストを忘れる → ファイルで共有が必須</a:t>
+            </a:r>
+            <a:endParaRPr lang="en-US" sz="1100" dirty="0"/>
+          </a:p>
+        </p:txBody>
+      </p:sp>
+      <p:sp>
+        <p:nvSpPr>
+          <p:cNvPr id="9" name="Shape 7"/>
+          <p:cNvSpPr/>
+          <p:nvPr/>
+        </p:nvSpPr>
+        <p:spPr>
+          <a:xfrm>
+            <a:off x="731520" y="3429000"/>
+            <a:ext cx="3383280" cy="685800"/>
+          </a:xfrm>
+          <a:prstGeom prst="rect">
+            <a:avLst/>
+          </a:prstGeom>
+          <a:solidFill>
+            <a:srgbClr val="1E2761"/>
+          </a:solidFill>
+          <a:ln w="12700">
+            <a:solidFill>
+              <a:srgbClr val="1E2761"/>
+            </a:solidFill>
+            <a:prstDash val="solid"/>
+          </a:ln>
+        </p:spPr>
+        <p:txBody>
+          <a:bodyPr/>
+          <a:p/>
+        </p:txBody>
+      </p:sp>
+      <p:sp>
+        <p:nvSpPr>
+          <p:cNvPr id="10" name="Text 8"/>
+          <p:cNvSpPr/>
+          <p:nvPr/>
+        </p:nvSpPr>
+        <p:spPr>
+          <a:xfrm>
+            <a:off x="822960" y="3429000"/>
+            <a:ext cx="3200400" cy="685800"/>
+          </a:xfrm>
+          <a:prstGeom prst="rect">
+            <a:avLst/>
+          </a:prstGeom>
+          <a:noFill/>
+          <a:ln/>
+        </p:spPr>
+        <p:txBody>
+          <a:bodyPr wrap="square" lIns="0" tIns="0" rIns="0" bIns="0" rtlCol="0" anchor="ctr"/>
+          <a:lstStyle/>
+          <a:p>
+            <a:pPr algn="ctr" indent="0" marL="0">
+              <a:buNone/>
+            </a:pPr>
+            <a:r>
+              <a:rPr lang="en-US" sz="1100" dirty="0">
+                <a:solidFill>
+                  <a:srgbClr val="FFFFFF"/>
+                </a:solidFill>
+                <a:latin typeface="Meiryo" pitchFamily="34" charset="0"/>
+                <a:ea typeface="Meiryo" pitchFamily="34" charset="-122"/>
+                <a:cs typeface="Meiryo" pitchFamily="34" charset="-120"/>
+              </a:rPr>
+              <a:t>親 → サブエージェント → ファイル出力 → 親が読む</a:t>
+            </a:r>
+            <a:endParaRPr lang="en-US" sz="1100" dirty="0"/>
+          </a:p>
+        </p:txBody>
+      </p:sp>
+      <p:sp>
+        <p:nvSpPr>
+          <p:cNvPr id="11" name="Text 9"/>
+          <p:cNvSpPr/>
+          <p:nvPr/>
+        </p:nvSpPr>
+        <p:spPr>
+          <a:xfrm>
+            <a:off x="4754880" y="1417320"/>
+            <a:ext cx="3931920" cy="320040"/>
+          </a:xfrm>
+          <a:prstGeom prst="rect">
+            <a:avLst/>
+          </a:prstGeom>
+          <a:noFill/>
+          <a:ln/>
+        </p:spPr>
+        <p:txBody>
+          <a:bodyPr wrap="square" lIns="0" tIns="0" rIns="0" bIns="0" rtlCol="0" anchor="ctr"/>
+          <a:lstStyle/>
+          <a:p>
+            <a:pPr indent="0" marL="0">
+              <a:buNone/>
+            </a:pPr>
+            <a:r>
+              <a:rPr lang="en-US" sz="1400" b="1" dirty="0">
+                <a:solidFill>
+                  <a:srgbClr val="1E2761"/>
+                </a:solidFill>
+                <a:latin typeface="Meiryo" pitchFamily="34" charset="0"/>
+                <a:ea typeface="Meiryo" pitchFamily="34" charset="-122"/>
+                <a:cs typeface="Meiryo" pitchFamily="34" charset="-120"/>
+              </a:rPr>
+              <a:t>推奨パターン（用途別）</a:t>
+            </a:r>
+            <a:endParaRPr lang="en-US" sz="1400" dirty="0"/>
+          </a:p>
+        </p:txBody>
+      </p:sp>
+      <p:sp>
+        <p:nvSpPr>
+          <p:cNvPr id="12" name="Shape 10"/>
+          <p:cNvSpPr/>
+          <p:nvPr/>
+        </p:nvSpPr>
+        <p:spPr>
+          <a:xfrm>
+            <a:off x="4754880" y="1828800"/>
+            <a:ext cx="1371600" cy="365760"/>
+          </a:xfrm>
+          <a:prstGeom prst="rect">
+            <a:avLst/>
+          </a:prstGeom>
+          <a:solidFill>
+            <a:srgbClr val="1E2761"/>
+          </a:solidFill>
+          <a:ln w="12700">
+            <a:solidFill>
+              <a:srgbClr val="1E2761"/>
+            </a:solidFill>
+            <a:prstDash val="solid"/>
+          </a:ln>
+        </p:spPr>
+        <p:txBody>
+          <a:bodyPr/>
+          <a:p/>
+        </p:txBody>
+      </p:sp>
+      <p:sp>
+        <p:nvSpPr>
+          <p:cNvPr id="13" name="Text 11"/>
+          <p:cNvSpPr/>
+          <p:nvPr/>
+        </p:nvSpPr>
+        <p:spPr>
+          <a:xfrm>
+            <a:off x="4754880" y="1828800"/>
+            <a:ext cx="1371600" cy="365760"/>
+          </a:xfrm>
+          <a:prstGeom prst="rect">
+            <a:avLst/>
+          </a:prstGeom>
+          <a:noFill/>
+          <a:ln/>
+        </p:spPr>
+        <p:txBody>
+          <a:bodyPr wrap="square" lIns="0" tIns="0" rIns="0" bIns="0" rtlCol="0" anchor="ctr"/>
+          <a:lstStyle/>
+          <a:p>
+            <a:pPr algn="ctr" indent="0" marL="0">
+              <a:buNone/>
+            </a:pPr>
+            <a:r>
+              <a:rPr lang="en-US" sz="1000" b="1" dirty="0">
+                <a:solidFill>
+                  <a:srgbClr val="FFFFFF"/>
+                </a:solidFill>
+                <a:latin typeface="Meiryo" pitchFamily="34" charset="0"/>
+                <a:ea typeface="Meiryo" pitchFamily="34" charset="-122"/>
+                <a:cs typeface="Meiryo" pitchFamily="34" charset="-120"/>
+              </a:rPr>
+              <a:t>用途</a:t>
+            </a:r>
+            <a:endParaRPr lang="en-US" sz="1000" dirty="0"/>
+          </a:p>
+        </p:txBody>
+      </p:sp>
+      <p:sp>
+        <p:nvSpPr>
+          <p:cNvPr id="14" name="Shape 12"/>
+          <p:cNvSpPr/>
+          <p:nvPr/>
+        </p:nvSpPr>
+        <p:spPr>
+          <a:xfrm>
+            <a:off x="6126480" y="1828800"/>
+            <a:ext cx="2560320" cy="365760"/>
+          </a:xfrm>
+          <a:prstGeom prst="rect">
+            <a:avLst/>
+          </a:prstGeom>
+          <a:solidFill>
+            <a:srgbClr val="1E2761"/>
+          </a:solidFill>
+          <a:ln w="12700">
+            <a:solidFill>
+              <a:srgbClr val="1E2761"/>
+            </a:solidFill>
+            <a:prstDash val="solid"/>
+          </a:ln>
+        </p:spPr>
+        <p:txBody>
+          <a:bodyPr/>
+          <a:p/>
+        </p:txBody>
+      </p:sp>
+      <p:sp>
+        <p:nvSpPr>
+          <p:cNvPr id="15" name="Text 13"/>
+          <p:cNvSpPr/>
+          <p:nvPr/>
+        </p:nvSpPr>
+        <p:spPr>
+          <a:xfrm>
+            <a:off x="6126480" y="1828800"/>
+            <a:ext cx="2560320" cy="365760"/>
+          </a:xfrm>
+          <a:prstGeom prst="rect">
+            <a:avLst/>
+          </a:prstGeom>
+          <a:noFill/>
+          <a:ln/>
+        </p:spPr>
+        <p:txBody>
+          <a:bodyPr wrap="square" lIns="0" tIns="0" rIns="0" bIns="0" rtlCol="0" anchor="ctr"/>
+          <a:lstStyle/>
+          <a:p>
+            <a:pPr algn="ctr" indent="0" marL="0">
+              <a:buNone/>
+            </a:pPr>
+            <a:r>
+              <a:rPr lang="en-US" sz="1000" b="1" dirty="0">
+                <a:solidFill>
+                  <a:srgbClr val="FFFFFF"/>
+                </a:solidFill>
+                <a:latin typeface="Meiryo" pitchFamily="34" charset="0"/>
+                <a:ea typeface="Meiryo" pitchFamily="34" charset="-122"/>
+                <a:cs typeface="Meiryo" pitchFamily="34" charset="-120"/>
+              </a:rPr>
+              <a:t>サブエージェント例</a:t>
+            </a:r>
+            <a:endParaRPr lang="en-US" sz="1000" dirty="0"/>
+          </a:p>
+        </p:txBody>
+      </p:sp>
+      <p:sp>
+        <p:nvSpPr>
+          <p:cNvPr id="16" name="Shape 14"/>
+          <p:cNvSpPr/>
+          <p:nvPr/>
+        </p:nvSpPr>
+        <p:spPr>
+          <a:xfrm>
+            <a:off x="4754880" y="2194560"/>
+            <a:ext cx="1371600" cy="685800"/>
+          </a:xfrm>
+          <a:prstGeom prst="rect">
+            <a:avLst/>
+          </a:prstGeom>
+          <a:solidFill>
+            <a:srgbClr val="F8F9FC"/>
+          </a:solidFill>
+          <a:ln w="6350">
+            <a:solidFill>
+              <a:srgbClr val="E5E9F2"/>
+            </a:solidFill>
+            <a:prstDash val="solid"/>
+          </a:ln>
+        </p:spPr>
+        <p:txBody>
+          <a:bodyPr/>
+          <a:p/>
+        </p:txBody>
+      </p:sp>
+      <p:sp>
+        <p:nvSpPr>
+          <p:cNvPr id="17" name="Text 15"/>
+          <p:cNvSpPr/>
+          <p:nvPr/>
+        </p:nvSpPr>
+        <p:spPr>
+          <a:xfrm>
+            <a:off x="4846320" y="2194560"/>
+            <a:ext cx="1188720" cy="685800"/>
+          </a:xfrm>
+          <a:prstGeom prst="rect">
+            <a:avLst/>
+          </a:prstGeom>
+          <a:noFill/>
+          <a:ln/>
+        </p:spPr>
+        <p:txBody>
+          <a:bodyPr wrap="square" lIns="0" tIns="0" rIns="0" bIns="0" rtlCol="0" anchor="ctr"/>
+          <a:lstStyle/>
+          <a:p>
+            <a:pPr indent="0" marL="0">
+              <a:buNone/>
+            </a:pPr>
+            <a:r>
+              <a:rPr lang="en-US" sz="950" b="1" dirty="0">
+                <a:solidFill>
+                  <a:srgbClr val="2D3748"/>
+                </a:solidFill>
+                <a:latin typeface="Meiryo" pitchFamily="34" charset="0"/>
+                <a:ea typeface="Meiryo" pitchFamily="34" charset="-122"/>
+                <a:cs typeface="Meiryo" pitchFamily="34" charset="-120"/>
+              </a:rPr>
+              <a:t>成果物チェック</a:t>
+            </a:r>
+            <a:endParaRPr lang="en-US" sz="950" dirty="0"/>
+          </a:p>
+        </p:txBody>
+      </p:sp>
+      <p:sp>
+        <p:nvSpPr>
+          <p:cNvPr id="18" name="Shape 16"/>
+          <p:cNvSpPr/>
+          <p:nvPr/>
+        </p:nvSpPr>
+        <p:spPr>
+          <a:xfrm>
+            <a:off x="6126480" y="2194560"/>
+            <a:ext cx="2560320" cy="685800"/>
+          </a:xfrm>
+          <a:prstGeom prst="rect">
+            <a:avLst/>
+          </a:prstGeom>
+          <a:solidFill>
+            <a:srgbClr val="F8F9FC"/>
+          </a:solidFill>
+          <a:ln w="6350">
+            <a:solidFill>
+              <a:srgbClr val="E5E9F2"/>
+            </a:solidFill>
+            <a:prstDash val="solid"/>
+          </a:ln>
+        </p:spPr>
+        <p:txBody>
+          <a:bodyPr/>
+          <a:p/>
+        </p:txBody>
+      </p:sp>
+      <p:sp>
+        <p:nvSpPr>
+          <p:cNvPr id="19" name="Text 17"/>
+          <p:cNvSpPr/>
+          <p:nvPr/>
+        </p:nvSpPr>
+        <p:spPr>
+          <a:xfrm>
+            <a:off x="6217920" y="2194560"/>
+            <a:ext cx="2377440" cy="685800"/>
+          </a:xfrm>
+          <a:prstGeom prst="rect">
+            <a:avLst/>
+          </a:prstGeom>
+          <a:noFill/>
+          <a:ln/>
+        </p:spPr>
+        <p:txBody>
+          <a:bodyPr wrap="square" lIns="0" tIns="0" rIns="0" bIns="0" rtlCol="0" anchor="ctr"/>
+          <a:lstStyle/>
+          <a:p>
+            <a:pPr indent="0" marL="0">
+              <a:buNone/>
+            </a:pPr>
+            <a:r>
+              <a:rPr lang="en-US" sz="950" dirty="0">
+                <a:solidFill>
+                  <a:srgbClr val="2D3748"/>
+                </a:solidFill>
+                <a:latin typeface="Consolas" pitchFamily="34" charset="0"/>
+                <a:ea typeface="Consolas" pitchFamily="34" charset="-122"/>
+                <a:cs typeface="Consolas" pitchFamily="34" charset="-120"/>
+              </a:rPr>
+              <a:t>Code-Reviewer</a:t>
+            </a:r>
+            <a:endParaRPr lang="en-US" sz="950" dirty="0"/>
+          </a:p>
+          <a:p>
+            <a:pPr indent="0" marL="0">
+              <a:buNone/>
+            </a:pPr>
+            <a:r>
+              <a:rPr lang="en-US" sz="950" dirty="0">
+                <a:solidFill>
+                  <a:srgbClr val="2D3748"/>
+                </a:solidFill>
+                <a:latin typeface="Consolas" pitchFamily="34" charset="0"/>
+                <a:ea typeface="Consolas" pitchFamily="34" charset="-122"/>
+                <a:cs typeface="Consolas" pitchFamily="34" charset="-120"/>
+              </a:rPr>
+              <a:t>Test-Analyzer</a:t>
+            </a:r>
+            <a:endParaRPr lang="en-US" sz="950" dirty="0"/>
+          </a:p>
+          <a:p>
+            <a:pPr indent="0" marL="0">
+              <a:buNone/>
+            </a:pPr>
+            <a:r>
+              <a:rPr lang="en-US" sz="950" dirty="0">
+                <a:solidFill>
+                  <a:srgbClr val="2D3748"/>
+                </a:solidFill>
+                <a:latin typeface="Consolas" pitchFamily="34" charset="0"/>
+                <a:ea typeface="Consolas" pitchFamily="34" charset="-122"/>
+                <a:cs typeface="Consolas" pitchFamily="34" charset="-120"/>
+              </a:rPr>
+              <a:t>Security-Checker</a:t>
+            </a:r>
+            <a:endParaRPr lang="en-US" sz="950" dirty="0"/>
+          </a:p>
+        </p:txBody>
+      </p:sp>
+      <p:sp>
+        <p:nvSpPr>
+          <p:cNvPr id="20" name="Shape 18"/>
+          <p:cNvSpPr/>
+          <p:nvPr/>
+        </p:nvSpPr>
+        <p:spPr>
+          <a:xfrm>
+            <a:off x="4754880" y="2880360"/>
+            <a:ext cx="1371600" cy="685800"/>
+          </a:xfrm>
+          <a:prstGeom prst="rect">
+            <a:avLst/>
+          </a:prstGeom>
+          <a:solidFill>
+            <a:srgbClr val="FFFFFF"/>
+          </a:solidFill>
+          <a:ln w="6350">
+            <a:solidFill>
+              <a:srgbClr val="E5E9F2"/>
+            </a:solidFill>
+            <a:prstDash val="solid"/>
+          </a:ln>
+        </p:spPr>
+        <p:txBody>
+          <a:bodyPr/>
+          <a:p/>
+        </p:txBody>
+      </p:sp>
+      <p:sp>
+        <p:nvSpPr>
+          <p:cNvPr id="21" name="Text 19"/>
+          <p:cNvSpPr/>
+          <p:nvPr/>
+        </p:nvSpPr>
+        <p:spPr>
+          <a:xfrm>
+            <a:off x="4846320" y="2880360"/>
+            <a:ext cx="1188720" cy="685800"/>
+          </a:xfrm>
+          <a:prstGeom prst="rect">
+            <a:avLst/>
+          </a:prstGeom>
+          <a:noFill/>
+          <a:ln/>
+        </p:spPr>
+        <p:txBody>
+          <a:bodyPr wrap="square" lIns="0" tIns="0" rIns="0" bIns="0" rtlCol="0" anchor="ctr"/>
+          <a:lstStyle/>
+          <a:p>
+            <a:pPr indent="0" marL="0">
+              <a:buNone/>
+            </a:pPr>
+            <a:r>
+              <a:rPr lang="en-US" sz="950" b="1" dirty="0">
+                <a:solidFill>
+                  <a:srgbClr val="2D3748"/>
+                </a:solidFill>
+                <a:latin typeface="Meiryo" pitchFamily="34" charset="0"/>
+                <a:ea typeface="Meiryo" pitchFamily="34" charset="-122"/>
+                <a:cs typeface="Meiryo" pitchFamily="34" charset="-120"/>
+              </a:rPr>
+              <a:t>情報収集</a:t>
+            </a:r>
+            <a:endParaRPr lang="en-US" sz="950" dirty="0"/>
+          </a:p>
+        </p:txBody>
+      </p:sp>
+      <p:sp>
+        <p:nvSpPr>
+          <p:cNvPr id="22" name="Shape 20"/>
+          <p:cNvSpPr/>
+          <p:nvPr/>
+        </p:nvSpPr>
+        <p:spPr>
+          <a:xfrm>
+            <a:off x="6126480" y="2880360"/>
+            <a:ext cx="2560320" cy="685800"/>
+          </a:xfrm>
+          <a:prstGeom prst="rect">
+            <a:avLst/>
+          </a:prstGeom>
+          <a:solidFill>
+            <a:srgbClr val="FFFFFF"/>
+          </a:solidFill>
+          <a:ln w="6350">
+            <a:solidFill>
+              <a:srgbClr val="E5E9F2"/>
+            </a:solidFill>
+            <a:prstDash val="solid"/>
+          </a:ln>
+        </p:spPr>
+        <p:txBody>
+          <a:bodyPr/>
+          <a:p/>
+        </p:txBody>
+      </p:sp>
+      <p:sp>
+        <p:nvSpPr>
+          <p:cNvPr id="23" name="Text 21"/>
+          <p:cNvSpPr/>
+          <p:nvPr/>
+        </p:nvSpPr>
+        <p:spPr>
+          <a:xfrm>
+            <a:off x="6217920" y="2880360"/>
+            <a:ext cx="2377440" cy="685800"/>
+          </a:xfrm>
+          <a:prstGeom prst="rect">
+            <a:avLst/>
+          </a:prstGeom>
+          <a:noFill/>
+          <a:ln/>
+        </p:spPr>
+        <p:txBody>
+          <a:bodyPr wrap="square" lIns="0" tIns="0" rIns="0" bIns="0" rtlCol="0" anchor="ctr"/>
+          <a:lstStyle/>
+          <a:p>
+            <a:pPr indent="0" marL="0">
+              <a:buNone/>
+            </a:pPr>
+            <a:r>
+              <a:rPr lang="en-US" sz="950" dirty="0">
+                <a:solidFill>
+                  <a:srgbClr val="2D3748"/>
+                </a:solidFill>
+                <a:latin typeface="Consolas" pitchFamily="34" charset="0"/>
+                <a:ea typeface="Consolas" pitchFamily="34" charset="-122"/>
+                <a:cs typeface="Consolas" pitchFamily="34" charset="-120"/>
+              </a:rPr>
+              <a:t>Impact-Analyzer</a:t>
+            </a:r>
+            <a:endParaRPr lang="en-US" sz="950" dirty="0"/>
+          </a:p>
+          <a:p>
+            <a:pPr indent="0" marL="0">
+              <a:buNone/>
+            </a:pPr>
+            <a:r>
+              <a:rPr lang="en-US" sz="950" dirty="0">
+                <a:solidFill>
+                  <a:srgbClr val="2D3748"/>
+                </a:solidFill>
+                <a:latin typeface="Consolas" pitchFamily="34" charset="0"/>
+                <a:ea typeface="Consolas" pitchFamily="34" charset="-122"/>
+                <a:cs typeface="Consolas" pitchFamily="34" charset="-120"/>
+              </a:rPr>
+              <a:t>Dependency-Checker</a:t>
+            </a:r>
+            <a:endParaRPr lang="en-US" sz="950" dirty="0"/>
+          </a:p>
+          <a:p>
+            <a:pPr indent="0" marL="0">
+              <a:buNone/>
+            </a:pPr>
+            <a:r>
+              <a:rPr lang="en-US" sz="950" dirty="0">
+                <a:solidFill>
+                  <a:srgbClr val="2D3748"/>
+                </a:solidFill>
+                <a:latin typeface="Consolas" pitchFamily="34" charset="0"/>
+                <a:ea typeface="Consolas" pitchFamily="34" charset="-122"/>
+                <a:cs typeface="Consolas" pitchFamily="34" charset="-120"/>
+              </a:rPr>
+              <a:t>File-Finder</a:t>
+            </a:r>
+            <a:endParaRPr lang="en-US" sz="950" dirty="0"/>
+          </a:p>
+        </p:txBody>
+      </p:sp>
+      <p:sp>
+        <p:nvSpPr>
+          <p:cNvPr id="24" name="Shape 22"/>
+          <p:cNvSpPr/>
+          <p:nvPr/>
+        </p:nvSpPr>
+        <p:spPr>
+          <a:xfrm>
+            <a:off x="4754880" y="3566160"/>
+            <a:ext cx="1371600" cy="685800"/>
+          </a:xfrm>
+          <a:prstGeom prst="rect">
+            <a:avLst/>
+          </a:prstGeom>
+          <a:solidFill>
+            <a:srgbClr val="F8F9FC"/>
+          </a:solidFill>
+          <a:ln w="6350">
+            <a:solidFill>
+              <a:srgbClr val="E5E9F2"/>
+            </a:solidFill>
+            <a:prstDash val="solid"/>
+          </a:ln>
+        </p:spPr>
+        <p:txBody>
+          <a:bodyPr/>
+          <a:p/>
+        </p:txBody>
+      </p:sp>
+      <p:sp>
+        <p:nvSpPr>
+          <p:cNvPr id="25" name="Text 23"/>
+          <p:cNvSpPr/>
+          <p:nvPr/>
+        </p:nvSpPr>
+        <p:spPr>
+          <a:xfrm>
+            <a:off x="4846320" y="3566160"/>
+            <a:ext cx="1188720" cy="685800"/>
+          </a:xfrm>
+          <a:prstGeom prst="rect">
+            <a:avLst/>
+          </a:prstGeom>
+          <a:noFill/>
+          <a:ln/>
+        </p:spPr>
+        <p:txBody>
+          <a:bodyPr wrap="square" lIns="0" tIns="0" rIns="0" bIns="0" rtlCol="0" anchor="ctr"/>
+          <a:lstStyle/>
+          <a:p>
+            <a:pPr indent="0" marL="0">
+              <a:buNone/>
+            </a:pPr>
+            <a:r>
+              <a:rPr lang="en-US" sz="950" b="1" dirty="0">
+                <a:solidFill>
+                  <a:srgbClr val="2D3748"/>
+                </a:solidFill>
+                <a:latin typeface="Meiryo" pitchFamily="34" charset="0"/>
+                <a:ea typeface="Meiryo" pitchFamily="34" charset="-122"/>
+                <a:cs typeface="Meiryo" pitchFamily="34" charset="-120"/>
+              </a:rPr>
+              <a:t>大量処理</a:t>
+            </a:r>
+            <a:endParaRPr lang="en-US" sz="950" dirty="0"/>
+          </a:p>
+        </p:txBody>
+      </p:sp>
+      <p:sp>
+        <p:nvSpPr>
+          <p:cNvPr id="26" name="Shape 24"/>
+          <p:cNvSpPr/>
+          <p:nvPr/>
+        </p:nvSpPr>
+        <p:spPr>
+          <a:xfrm>
+            <a:off x="6126480" y="3566160"/>
+            <a:ext cx="2560320" cy="685800"/>
+          </a:xfrm>
+          <a:prstGeom prst="rect">
+            <a:avLst/>
+          </a:prstGeom>
+          <a:solidFill>
+            <a:srgbClr val="F8F9FC"/>
+          </a:solidFill>
+          <a:ln w="6350">
+            <a:solidFill>
+              <a:srgbClr val="E5E9F2"/>
+            </a:solidFill>
+            <a:prstDash val="solid"/>
+          </a:ln>
+        </p:spPr>
+        <p:txBody>
+          <a:bodyPr/>
+          <a:p/>
+        </p:txBody>
+      </p:sp>
+      <p:sp>
+        <p:nvSpPr>
+          <p:cNvPr id="27" name="Text 25"/>
+          <p:cNvSpPr/>
+          <p:nvPr/>
+        </p:nvSpPr>
+        <p:spPr>
+          <a:xfrm>
+            <a:off x="6217920" y="3566160"/>
+            <a:ext cx="2377440" cy="685800"/>
+          </a:xfrm>
+          <a:prstGeom prst="rect">
+            <a:avLst/>
+          </a:prstGeom>
+          <a:noFill/>
+          <a:ln/>
+        </p:spPr>
+        <p:txBody>
+          <a:bodyPr wrap="square" lIns="0" tIns="0" rIns="0" bIns="0" rtlCol="0" anchor="ctr"/>
+          <a:lstStyle/>
+          <a:p>
+            <a:pPr indent="0" marL="0">
+              <a:buNone/>
+            </a:pPr>
+            <a:r>
+              <a:rPr lang="en-US" sz="950" dirty="0">
+                <a:solidFill>
+                  <a:srgbClr val="2D3748"/>
+                </a:solidFill>
+                <a:latin typeface="Consolas" pitchFamily="34" charset="0"/>
+                <a:ea typeface="Consolas" pitchFamily="34" charset="-122"/>
+                <a:cs typeface="Consolas" pitchFamily="34" charset="-120"/>
+              </a:rPr>
+              <a:t>Test-Runner</a:t>
+            </a:r>
+            <a:endParaRPr lang="en-US" sz="950" dirty="0"/>
+          </a:p>
+          <a:p>
+            <a:pPr indent="0" marL="0">
+              <a:buNone/>
+            </a:pPr>
+            <a:r>
+              <a:rPr lang="en-US" sz="950" dirty="0">
+                <a:solidFill>
+                  <a:srgbClr val="2D3748"/>
+                </a:solidFill>
+                <a:latin typeface="Consolas" pitchFamily="34" charset="0"/>
+                <a:ea typeface="Consolas" pitchFamily="34" charset="-122"/>
+                <a:cs typeface="Consolas" pitchFamily="34" charset="-120"/>
+              </a:rPr>
+              <a:t>Build-Executor</a:t>
+            </a:r>
+            <a:endParaRPr lang="en-US" sz="950" dirty="0"/>
+          </a:p>
+          <a:p>
+            <a:pPr indent="0" marL="0">
+              <a:buNone/>
+            </a:pPr>
+            <a:r>
+              <a:rPr lang="en-US" sz="950" dirty="0">
+                <a:solidFill>
+                  <a:srgbClr val="2D3748"/>
+                </a:solidFill>
+                <a:latin typeface="Consolas" pitchFamily="34" charset="0"/>
+                <a:ea typeface="Consolas" pitchFamily="34" charset="-122"/>
+                <a:cs typeface="Consolas" pitchFamily="34" charset="-120"/>
+              </a:rPr>
+              <a:t>Log-Analyzer</a:t>
+            </a:r>
+            <a:endParaRPr lang="en-US" sz="950" dirty="0"/>
+          </a:p>
+        </p:txBody>
+      </p:sp>
+      <p:sp>
+        <p:nvSpPr>
+          <p:cNvPr id="28" name="Shape 26"/>
+          <p:cNvSpPr/>
+          <p:nvPr/>
+        </p:nvSpPr>
+        <p:spPr>
+          <a:xfrm>
+            <a:off x="457200" y="4434840"/>
+            <a:ext cx="8229600" cy="365760"/>
+          </a:xfrm>
+          <a:prstGeom prst="rect">
+            <a:avLst/>
+          </a:prstGeom>
+          <a:solidFill>
+            <a:srgbClr val="151B47"/>
+          </a:solidFill>
+          <a:ln w="12700">
+            <a:solidFill>
+              <a:srgbClr val="151B47"/>
+            </a:solidFill>
+            <a:prstDash val="solid"/>
+          </a:ln>
+        </p:spPr>
+        <p:txBody>
+          <a:bodyPr/>
+          <a:p/>
+        </p:txBody>
+      </p:sp>
+      <p:sp>
+        <p:nvSpPr>
+          <p:cNvPr id="29" name="Text 27"/>
+          <p:cNvSpPr/>
+          <p:nvPr/>
+        </p:nvSpPr>
+        <p:spPr>
+          <a:xfrm>
+            <a:off x="594360" y="4434840"/>
+            <a:ext cx="7955280" cy="365760"/>
+          </a:xfrm>
+          <a:prstGeom prst="rect">
+            <a:avLst/>
+          </a:prstGeom>
+          <a:noFill/>
+          <a:ln/>
+        </p:spPr>
+        <p:txBody>
+          <a:bodyPr wrap="square" lIns="0" tIns="0" rIns="0" bIns="0" rtlCol="0" anchor="ctr"/>
+          <a:lstStyle/>
+          <a:p>
+            <a:pPr indent="0" marL="0">
+              <a:buNone/>
+            </a:pPr>
+            <a:r>
+              <a:rPr lang="en-US" sz="1200" dirty="0">
+                <a:solidFill>
+                  <a:srgbClr val="FFFFFF"/>
+                </a:solidFill>
+                <a:latin typeface="Meiryo" pitchFamily="34" charset="0"/>
+                <a:ea typeface="Meiryo" pitchFamily="34" charset="-122"/>
+                <a:cs typeface="Meiryo" pitchFamily="34" charset="-120"/>
+              </a:rPr>
+              <a:t>💡 </a:t>
+            </a:r>
+            <a:pPr indent="0" marL="0">
+              <a:buNone/>
+            </a:pPr>
+            <a:r>
+              <a:rPr lang="en-US" sz="1100" dirty="0">
+                <a:solidFill>
+                  <a:srgbClr val="CADCFC"/>
+                </a:solidFill>
+                <a:latin typeface="Meiryo" pitchFamily="34" charset="0"/>
+                <a:ea typeface="Meiryo" pitchFamily="34" charset="-122"/>
+                <a:cs typeface="Meiryo" pitchFamily="34" charset="-120"/>
+              </a:rPr>
+              <a:t>サブエージェントの詳細は第8回「Agent Teams」で本格展開</a:t>
+            </a:r>
+            <a:endParaRPr lang="en-US" sz="1100" dirty="0"/>
+          </a:p>
+        </p:txBody>
+      </p:sp>
+      <p:sp>
+        <p:nvSpPr>
+          <p:cNvPr id="30" name="Text 28"/>
+          <p:cNvSpPr/>
+          <p:nvPr/>
+        </p:nvSpPr>
+        <p:spPr>
+          <a:xfrm>
+            <a:off x="5486400" y="4828032"/>
+            <a:ext cx="3474720" cy="228600"/>
+          </a:xfrm>
+          <a:prstGeom prst="rect">
+            <a:avLst/>
+          </a:prstGeom>
+          <a:noFill/>
+          <a:ln/>
+        </p:spPr>
+        <p:txBody>
+          <a:bodyPr wrap="square" rtlCol="0" anchor="ctr"/>
+          <a:lstStyle/>
+          <a:p>
+            <a:pPr algn="r" indent="0" marL="0">
+              <a:buNone/>
+            </a:pPr>
+            <a:r>
+              <a:rPr lang="en-US" sz="1000" spc="100" kern="0" dirty="0">
+                <a:solidFill>
+                  <a:srgbClr val="64748B"/>
+                </a:solidFill>
+                <a:latin typeface="Arial" pitchFamily="34" charset="0"/>
+                <a:ea typeface="Arial" pitchFamily="34" charset="-122"/>
+                <a:cs typeface="Arial" pitchFamily="34" charset="-120"/>
+              </a:rPr>
+              <a:t>○ ○ ○ ● ○ ○ ○ ○ ○ ○</a:t>
+            </a:r>
+            <a:endParaRPr lang="en-US" sz="1000" dirty="0"/>
+          </a:p>
+        </p:txBody>
+      </p:sp>
+    </p:spTree>
+  </p:cSld>
+  <p:clrMapOvr>
+    <a:masterClrMapping/>
+  </p:clrMapOvr>
+</p:sld>
+</file>
+
+<file path=ppt/slides/slide11.xml><?xml version="1.0" encoding="utf-8"?>
 <p:sld xmlns:a="http://schemas.openxmlformats.org/drawingml/2006/main" xmlns:r="http://schemas.openxmlformats.org/officeDocument/2006/relationships" xmlns:p="http://schemas.openxmlformats.org/presentationml/2006/main">
   <p:cSld name="Slide 10">
     <p:bg>
@@ -2351,6 +3605,10 @@
             <a:prstDash val="solid"/>
           </a:ln>
         </p:spPr>
+        <p:txBody>
+          <a:bodyPr/>
+          <a:p/>
+        </p:txBody>
       </p:sp>
       <p:sp>
         <p:nvSpPr>
@@ -2376,6 +3634,10 @@
             <a:prstDash val="solid"/>
           </a:ln>
         </p:spPr>
+        <p:txBody>
+          <a:bodyPr/>
+          <a:p/>
+        </p:txBody>
       </p:sp>
       <p:sp>
         <p:nvSpPr>
@@ -2401,6 +3663,10 @@
             <a:prstDash val="solid"/>
           </a:ln>
         </p:spPr>
+        <p:txBody>
+          <a:bodyPr/>
+          <a:p/>
+        </p:txBody>
       </p:sp>
       <p:sp>
         <p:nvSpPr>
@@ -2582,6 +3848,10 @@
             <a:prstDash val="solid"/>
           </a:ln>
         </p:spPr>
+        <p:txBody>
+          <a:bodyPr/>
+          <a:p/>
+        </p:txBody>
       </p:sp>
       <p:sp>
         <p:nvSpPr>
@@ -2607,6 +3877,10 @@
             <a:prstDash val="solid"/>
           </a:ln>
         </p:spPr>
+        <p:txBody>
+          <a:bodyPr/>
+          <a:p/>
+        </p:txBody>
       </p:sp>
       <p:sp>
         <p:nvSpPr>
@@ -2788,6 +4062,10 @@
             <a:prstDash val="solid"/>
           </a:ln>
         </p:spPr>
+        <p:txBody>
+          <a:bodyPr/>
+          <a:p/>
+        </p:txBody>
       </p:sp>
       <p:sp>
         <p:nvSpPr>
@@ -2813,6 +4091,10 @@
             <a:prstDash val="solid"/>
           </a:ln>
         </p:spPr>
+        <p:txBody>
+          <a:bodyPr/>
+          <a:p/>
+        </p:txBody>
       </p:sp>
       <p:sp>
         <p:nvSpPr>
@@ -3017,7 +4299,7 @@
 </p:sld>
 </file>
 
-<file path=ppt/slides/slide11.xml><?xml version="1.0" encoding="utf-8"?>
+<file path=ppt/slides/slide12.xml><?xml version="1.0" encoding="utf-8"?>
 <p:sld xmlns:a="http://schemas.openxmlformats.org/drawingml/2006/main" xmlns:r="http://schemas.openxmlformats.org/officeDocument/2006/relationships" xmlns:p="http://schemas.openxmlformats.org/presentationml/2006/main">
   <p:cSld name="Slide 11">
     <p:bg>
@@ -3143,6 +4425,10 @@
             <a:prstDash val="solid"/>
           </a:ln>
         </p:spPr>
+        <p:txBody>
+          <a:bodyPr/>
+          <a:p/>
+        </p:txBody>
       </p:sp>
       <p:sp>
         <p:nvSpPr>
@@ -3164,6 +4450,21 @@
         <p:txBody>
           <a:bodyPr wrap="square" lIns="0" tIns="0" rIns="0" bIns="0" rtlCol="0" anchor="t"/>
           <a:lstStyle/>
+          <a:p>
+            <a:pPr algn="ctr"/>
+            <a:r>
+              <a:rPr lang="ja-JP" sz="2200" b="1">
+                <a:solidFill>
+                  <a:srgbClr val="FFC800"/>
+                </a:solidFill>
+                <a:latin typeface="+mj-lt"/>
+              </a:rPr>
+              <a:t>★ 「繰り返し作業はSkillにする」</a:t>
+            </a:r>
+          </a:p>
+          <a:p>
+            <a:endParaRPr lang="ja-JP" sz="800"/>
+          </a:p>
           <a:p>
             <a:pPr indent="0" marL="0">
               <a:spcAft>
@@ -3386,6 +4687,10 @@
             <a:prstDash val="solid"/>
           </a:ln>
         </p:spPr>
+        <p:txBody>
+          <a:bodyPr/>
+          <a:p/>
+        </p:txBody>
       </p:sp>
       <p:sp>
         <p:nvSpPr>
@@ -3450,6 +4755,10 @@
             <a:prstDash val="solid"/>
           </a:ln>
         </p:spPr>
+        <p:txBody>
+          <a:bodyPr/>
+          <a:p/>
+        </p:txBody>
       </p:sp>
       <p:sp>
         <p:nvSpPr>
@@ -3514,6 +4823,10 @@
             <a:prstDash val="solid"/>
           </a:ln>
         </p:spPr>
+        <p:txBody>
+          <a:bodyPr/>
+          <a:p/>
+        </p:txBody>
       </p:sp>
       <p:sp>
         <p:nvSpPr>
@@ -3578,6 +4891,10 @@
             <a:prstDash val="solid"/>
           </a:ln>
         </p:spPr>
+        <p:txBody>
+          <a:bodyPr/>
+          <a:p/>
+        </p:txBody>
       </p:sp>
       <p:sp>
         <p:nvSpPr>
@@ -3642,6 +4959,10 @@
             <a:prstDash val="solid"/>
           </a:ln>
         </p:spPr>
+        <p:txBody>
+          <a:bodyPr/>
+          <a:p/>
+        </p:txBody>
       </p:sp>
       <p:sp>
         <p:nvSpPr>
@@ -3679,6 +5000,39 @@
               <a:t>作業内容をファイルに残すことで、/clearしても継続できると分かった</a:t>
             </a:r>
             <a:endParaRPr lang="en-US" sz="1100" dirty="0"/>
+          </a:p>
+        </p:txBody>
+      </p:sp>
+      <p:sp>
+        <p:nvSpPr>
+          <p:cNvPr id="16" name="TextBox 15"/>
+          <p:cNvSpPr txBox="1"/>
+          <p:nvPr/>
+        </p:nvSpPr>
+        <p:spPr>
+          <a:xfrm>
+            <a:off x="457200" y="4900000"/>
+            <a:ext cx="8229600" cy="220000"/>
+          </a:xfrm>
+          <a:prstGeom prst="rect">
+            <a:avLst/>
+          </a:prstGeom>
+          <a:noFill/>
+        </p:spPr>
+        <p:txBody>
+          <a:bodyPr wrap="square" lIns="0" rIns="0" tIns="0" bIns="0">
+            <a:spAutoFit/>
+          </a:bodyPr>
+          <a:lstStyle/>
+          <a:p>
+            <a:r>
+              <a:rPr sz="1100" b="1">
+                <a:solidFill>
+                  <a:srgbClr val="FFC800"/>
+                </a:solidFill>
+              </a:rPr>
+              <a:t>3原則の現在地：  01 分ける ✅    02 防ぐ ✅+    03 残す ⏳    （防ぐの延長: 自動化・共有）</a:t>
+            </a:r>
           </a:p>
         </p:txBody>
       </p:sp>
@@ -3690,7 +5044,7 @@
 </p:sld>
 </file>
 
-<file path=ppt/slides/slide12.xml><?xml version="1.0" encoding="utf-8"?>
+<file path=ppt/slides/slide13.xml><?xml version="1.0" encoding="utf-8"?>
 <p:sld xmlns:a="http://schemas.openxmlformats.org/drawingml/2006/main" xmlns:r="http://schemas.openxmlformats.org/officeDocument/2006/relationships" xmlns:p="http://schemas.openxmlformats.org/presentationml/2006/main">
   <p:cSld name="Slide 12">
     <p:bg>
@@ -3816,6 +5170,10 @@
             <a:prstDash val="solid"/>
           </a:ln>
         </p:spPr>
+        <p:txBody>
+          <a:bodyPr/>
+          <a:p/>
+        </p:txBody>
       </p:sp>
       <p:sp>
         <p:nvSpPr>
@@ -3841,6 +5199,10 @@
             <a:prstDash val="solid"/>
           </a:ln>
         </p:spPr>
+        <p:txBody>
+          <a:bodyPr/>
+          <a:p/>
+        </p:txBody>
       </p:sp>
       <p:sp>
         <p:nvSpPr>
@@ -3958,6 +5320,10 @@
             <a:prstDash val="solid"/>
           </a:ln>
         </p:spPr>
+        <p:txBody>
+          <a:bodyPr/>
+          <a:p/>
+        </p:txBody>
       </p:sp>
       <p:sp>
         <p:nvSpPr>
@@ -4022,6 +5388,10 @@
             <a:prstDash val="solid"/>
           </a:ln>
         </p:spPr>
+        <p:txBody>
+          <a:bodyPr/>
+          <a:p/>
+        </p:txBody>
       </p:sp>
       <p:sp>
         <p:nvSpPr>
@@ -4086,6 +5456,10 @@
             <a:prstDash val="solid"/>
           </a:ln>
         </p:spPr>
+        <p:txBody>
+          <a:bodyPr/>
+          <a:p/>
+        </p:txBody>
       </p:sp>
       <p:sp>
         <p:nvSpPr>
@@ -4150,6 +5524,10 @@
             <a:prstDash val="solid"/>
           </a:ln>
         </p:spPr>
+        <p:txBody>
+          <a:bodyPr/>
+          <a:p/>
+        </p:txBody>
       </p:sp>
       <p:sp>
         <p:nvSpPr>
@@ -4214,6 +5592,10 @@
             <a:prstDash val="solid"/>
           </a:ln>
         </p:spPr>
+        <p:txBody>
+          <a:bodyPr/>
+          <a:p/>
+        </p:txBody>
       </p:sp>
       <p:sp>
         <p:nvSpPr>
@@ -4239,6 +5621,10 @@
             <a:prstDash val="solid"/>
           </a:ln>
         </p:spPr>
+        <p:txBody>
+          <a:bodyPr/>
+          <a:p/>
+        </p:txBody>
       </p:sp>
       <p:sp>
         <p:nvSpPr>
@@ -4341,6 +5727,264 @@
 </file>
 
 <file path=ppt/slides/slide2.xml><?xml version="1.0" encoding="utf-8"?>
+<p:sld xmlns:a="http://schemas.openxmlformats.org/drawingml/2006/main" xmlns:p="http://schemas.openxmlformats.org/presentationml/2006/main" xmlns:r="http://schemas.openxmlformats.org/officeDocument/2006/relationships">
+  <p:cSld>
+    <p:bg>
+      <p:bgPr>
+        <a:solidFill>
+          <a:srgbClr val="FFFFFF"/>
+        </a:solidFill>
+        <a:effectLst/>
+      </p:bgPr>
+    </p:bg>
+    <p:spTree>
+      <p:nvGrpSpPr>
+        <p:cNvPr id="1" name=""/>
+        <p:cNvGrpSpPr/>
+        <p:nvPr/>
+      </p:nvGrpSpPr>
+      <p:grpSpPr/>
+      <p:sp>
+        <p:nvSpPr>
+          <p:cNvPr id="2" name="TextBox 1"/>
+          <p:cNvSpPr txBox="1"/>
+          <p:nvPr/>
+        </p:nvSpPr>
+        <p:spPr>
+          <a:xfrm>
+            <a:off x="457200" y="320040"/>
+            <a:ext cx="8229600" cy="548640"/>
+          </a:xfrm>
+          <a:prstGeom prst="rect">
+            <a:avLst/>
+          </a:prstGeom>
+          <a:noFill/>
+        </p:spPr>
+        <p:txBody>
+          <a:bodyPr wrap="square" lIns="0" rIns="0" tIns="0" bIns="0">
+            <a:spAutoFit/>
+          </a:bodyPr>
+          <a:lstStyle/>
+          <a:p>
+            <a:r>
+              <a:rPr sz="2600" b="1" i="0">
+                <a:solidFill>
+                  <a:srgbClr val="1E2761"/>
+                </a:solidFill>
+              </a:rPr>
+              <a:t>今日の用語ミニ辞典 ― 迷ったらここに戻る</a:t>
+            </a:r>
+          </a:p>
+        </p:txBody>
+      </p:sp>
+      <p:sp>
+        <p:nvSpPr>
+          <p:cNvPr id="3" name="TextBox 2"/>
+          <p:cNvSpPr txBox="1"/>
+          <p:nvPr/>
+        </p:nvSpPr>
+        <p:spPr>
+          <a:xfrm>
+            <a:off x="457200" y="960000"/>
+            <a:ext cx="8229600" cy="330000"/>
+          </a:xfrm>
+          <a:prstGeom prst="rect">
+            <a:avLst/>
+          </a:prstGeom>
+          <a:noFill/>
+        </p:spPr>
+        <p:txBody>
+          <a:bodyPr wrap="square" lIns="0" rIns="0" tIns="0" bIns="0">
+            <a:spAutoFit/>
+          </a:bodyPr>
+          <a:lstStyle/>
+          <a:p>
+            <a:r>
+              <a:rPr sz="1300" b="0" i="1">
+                <a:solidFill>
+                  <a:srgbClr val="64748B"/>
+                </a:solidFill>
+              </a:rPr>
+              <a:t>今日のスライドで初めて出てくるカタカナ語を1行で説明</a:t>
+            </a:r>
+          </a:p>
+        </p:txBody>
+      </p:sp>
+      <p:sp>
+        <p:nvSpPr>
+          <p:cNvPr id="4" name="TextBox 3"/>
+          <p:cNvSpPr txBox="1"/>
+          <p:nvPr/>
+        </p:nvSpPr>
+        <p:spPr>
+          <a:xfrm>
+            <a:off x="457200" y="1450000"/>
+            <a:ext cx="8229600" cy="3500000"/>
+          </a:xfrm>
+          <a:prstGeom prst="rect">
+            <a:avLst/>
+          </a:prstGeom>
+          <a:noFill/>
+        </p:spPr>
+        <p:txBody>
+          <a:bodyPr wrap="square" lIns="0" rIns="0" tIns="0" bIns="0">
+            <a:spAutoFit/>
+          </a:bodyPr>
+          <a:lstStyle/>
+          <a:p>
+            <a:r>
+              <a:rPr sz="1600" b="1">
+                <a:solidFill>
+                  <a:srgbClr val="1E2761"/>
+                </a:solidFill>
+              </a:rPr>
+              <a:t>●  Skills</a:t>
+            </a:r>
+            <a:r>
+              <a:rPr sz="1400" b="0">
+                <a:solidFill>
+                  <a:srgbClr val="2D3748"/>
+                </a:solidFill>
+              </a:rPr>
+              <a:t>　＝　Claude Codeが必要時に自動で読み込む手順書</a:t>
+            </a:r>
+          </a:p>
+          <a:p>
+            <a:pPr>
+              <a:spcBef>
+                <a:spcPts val="800"/>
+              </a:spcBef>
+            </a:pPr>
+            <a:r>
+              <a:rPr sz="1600" b="1">
+                <a:solidFill>
+                  <a:srgbClr val="1E2761"/>
+                </a:solidFill>
+              </a:rPr>
+              <a:t>●  MCP</a:t>
+            </a:r>
+            <a:r>
+              <a:rPr sz="1400" b="0">
+                <a:solidFill>
+                  <a:srgbClr val="2D3748"/>
+                </a:solidFill>
+              </a:rPr>
+              <a:t>　＝　外部ツールと話すための共通プロトコル</a:t>
+            </a:r>
+          </a:p>
+          <a:p>
+            <a:pPr>
+              <a:spcBef>
+                <a:spcPts val="800"/>
+              </a:spcBef>
+            </a:pPr>
+            <a:r>
+              <a:rPr sz="1600" b="1">
+                <a:solidFill>
+                  <a:srgbClr val="1E2761"/>
+                </a:solidFill>
+              </a:rPr>
+              <a:t>●  スラッシュコマンド</a:t>
+            </a:r>
+            <a:r>
+              <a:rPr sz="1400" b="0">
+                <a:solidFill>
+                  <a:srgbClr val="2D3748"/>
+                </a:solidFill>
+              </a:rPr>
+              <a:t>　＝　ユーザーが/xxxで呼び出すワークフロー</a:t>
+            </a:r>
+          </a:p>
+          <a:p>
+            <a:pPr>
+              <a:spcBef>
+                <a:spcPts val="800"/>
+              </a:spcBef>
+            </a:pPr>
+            <a:r>
+              <a:rPr sz="1600" b="1">
+                <a:solidFill>
+                  <a:srgbClr val="1E2761"/>
+                </a:solidFill>
+              </a:rPr>
+              <a:t>●  Plugin</a:t>
+            </a:r>
+            <a:r>
+              <a:rPr sz="1400" b="0">
+                <a:solidFill>
+                  <a:srgbClr val="2D3748"/>
+                </a:solidFill>
+              </a:rPr>
+              <a:t>　＝　Skills+コマンド+設定をまとめた配布パッケージ</a:t>
+            </a:r>
+          </a:p>
+          <a:p>
+            <a:pPr>
+              <a:spcBef>
+                <a:spcPts val="800"/>
+              </a:spcBef>
+            </a:pPr>
+            <a:r>
+              <a:rPr sz="1600" b="1">
+                <a:solidFill>
+                  <a:srgbClr val="1E2761"/>
+                </a:solidFill>
+              </a:rPr>
+              <a:t>●  コンテキストウィンドウ</a:t>
+            </a:r>
+            <a:r>
+              <a:rPr sz="1400" b="0">
+                <a:solidFill>
+                  <a:srgbClr val="2D3748"/>
+                </a:solidFill>
+              </a:rPr>
+              <a:t>　＝　AIが一度に覚えていられる情報の窓（揮発性）</a:t>
+            </a:r>
+          </a:p>
+        </p:txBody>
+      </p:sp>
+      <p:sp>
+        <p:nvSpPr>
+          <p:cNvPr id="5" name="TextBox 4"/>
+          <p:cNvSpPr txBox="1"/>
+          <p:nvPr/>
+        </p:nvSpPr>
+        <p:spPr>
+          <a:xfrm>
+            <a:off x="457200" y="4828032"/>
+            <a:ext cx="8229600" cy="228600"/>
+          </a:xfrm>
+          <a:prstGeom prst="rect">
+            <a:avLst/>
+          </a:prstGeom>
+          <a:noFill/>
+        </p:spPr>
+        <p:txBody>
+          <a:bodyPr wrap="square" lIns="0" rIns="0" tIns="0" bIns="0">
+            <a:spAutoFit/>
+          </a:bodyPr>
+          <a:lstStyle/>
+          <a:p>
+            <a:r>
+              <a:rPr sz="1000" b="0" i="1">
+                <a:solidFill>
+                  <a:srgbClr val="64748B"/>
+                </a:solidFill>
+              </a:rPr>
+              <a:t>★ 用語が分からなくなったらここへ戻ってください</a:t>
+            </a:r>
+          </a:p>
+        </p:txBody>
+      </p:sp>
+    </p:spTree>
+  </p:cSld>
+  <p:clrMapOvr>
+    <a:masterClrMapping/>
+  </p:clrMapOvr>
+</p:sld>
+</file>
+
+<file path=ppt/slides/slide3.xml><?xml version="1.0" encoding="utf-8"?>
 <p:sld xmlns:a="http://schemas.openxmlformats.org/drawingml/2006/main" xmlns:r="http://schemas.openxmlformats.org/officeDocument/2006/relationships" xmlns:p="http://schemas.openxmlformats.org/presentationml/2006/main">
   <p:cSld name="Slide 2">
     <p:bg>
@@ -4427,6 +6071,10 @@
             <a:prstDash val="solid"/>
           </a:ln>
         </p:spPr>
+        <p:txBody>
+          <a:bodyPr/>
+          <a:p/>
+        </p:txBody>
       </p:sp>
       <p:sp>
         <p:nvSpPr>
@@ -4491,6 +6139,10 @@
             <a:prstDash val="solid"/>
           </a:ln>
         </p:spPr>
+        <p:txBody>
+          <a:bodyPr/>
+          <a:p/>
+        </p:txBody>
       </p:sp>
       <p:sp>
         <p:nvSpPr>
@@ -4516,6 +6168,10 @@
             <a:prstDash val="solid"/>
           </a:ln>
         </p:spPr>
+        <p:txBody>
+          <a:bodyPr/>
+          <a:p/>
+        </p:txBody>
       </p:sp>
       <p:sp>
         <p:nvSpPr>
@@ -4642,6 +6298,10 @@
             <a:prstDash val="solid"/>
           </a:ln>
         </p:spPr>
+        <p:txBody>
+          <a:bodyPr/>
+          <a:p/>
+        </p:txBody>
       </p:sp>
       <p:sp>
         <p:nvSpPr>
@@ -4777,6 +6437,10 @@
             <a:prstDash val="solid"/>
           </a:ln>
         </p:spPr>
+        <p:txBody>
+          <a:bodyPr/>
+          <a:p/>
+        </p:txBody>
       </p:sp>
       <p:sp>
         <p:nvSpPr>
@@ -4887,7 +6551,7 @@
 </p:sld>
 </file>
 
-<file path=ppt/slides/slide3.xml><?xml version="1.0" encoding="utf-8"?>
+<file path=ppt/slides/slide4.xml><?xml version="1.0" encoding="utf-8"?>
 <p:sld xmlns:a="http://schemas.openxmlformats.org/drawingml/2006/main" xmlns:r="http://schemas.openxmlformats.org/officeDocument/2006/relationships" xmlns:p="http://schemas.openxmlformats.org/presentationml/2006/main">
   <p:cSld name="Slide 3">
     <p:bg>
@@ -4944,7 +6608,7 @@
                 <a:ea typeface="Arial Black" pitchFamily="34" charset="-122"/>
                 <a:cs typeface="Arial Black" pitchFamily="34" charset="-120"/>
               </a:rPr>
-              <a:t>今日の5つの武器</a:t>
+              <a:t>今日の主軸は2つ ― Skills と コンテキスト設計</a:t>
             </a:r>
             <a:endParaRPr lang="en-US" sz="2600" dirty="0"/>
           </a:p>
@@ -4974,6 +6638,10 @@
             <a:prstDash val="solid"/>
           </a:ln>
         </p:spPr>
+        <p:txBody>
+          <a:bodyPr/>
+          <a:p/>
+        </p:txBody>
       </p:sp>
       <p:sp>
         <p:nvSpPr>
@@ -5008,7 +6676,7 @@
                 <a:ea typeface="Meiryo" pitchFamily="34" charset="-122"/>
                 <a:cs typeface="Meiryo" pitchFamily="34" charset="-120"/>
               </a:rPr>
-              <a:t>繰り返す・共有する・コンテキストを設計する</a:t>
+              <a:t>MCP / コマンド / Plugin は『Skillsの仲間』 ― 順に触れる</a:t>
             </a:r>
             <a:endParaRPr lang="en-US" sz="1300" dirty="0"/>
           </a:p>
@@ -5038,6 +6706,10 @@
             <a:prstDash val="solid"/>
           </a:ln>
         </p:spPr>
+        <p:txBody>
+          <a:bodyPr/>
+          <a:p/>
+        </p:txBody>
       </p:sp>
       <p:pic>
         <p:nvPicPr>
@@ -5090,13 +6762,13 @@
             <a:r>
               <a:rPr lang="en-US" sz="1200" b="1" dirty="0">
                 <a:solidFill>
-                  <a:srgbClr val="FFFFFF"/>
+                  <a:srgbClr val="FFC800"/>
                 </a:solidFill>
                 <a:latin typeface="Arial Black" pitchFamily="34" charset="0"/>
                 <a:ea typeface="Arial Black" pitchFamily="34" charset="-122"/>
                 <a:cs typeface="Arial Black" pitchFamily="34" charset="-120"/>
               </a:rPr>
-              <a:t>Skills</a:t>
+              <a:t>★ Skills</a:t>
             </a:r>
             <a:endParaRPr lang="en-US" sz="1200" dirty="0"/>
           </a:p>
@@ -5182,6 +6854,10 @@
             <a:prstDash val="solid"/>
           </a:ln>
         </p:spPr>
+        <p:txBody>
+          <a:bodyPr/>
+          <a:p/>
+        </p:txBody>
       </p:sp>
       <p:pic>
         <p:nvPicPr>
@@ -5326,6 +7002,10 @@
             <a:prstDash val="solid"/>
           </a:ln>
         </p:spPr>
+        <p:txBody>
+          <a:bodyPr/>
+          <a:p/>
+        </p:txBody>
       </p:sp>
       <p:pic>
         <p:nvPicPr>
@@ -5487,6 +7167,10 @@
             <a:prstDash val="solid"/>
           </a:ln>
         </p:spPr>
+        <p:txBody>
+          <a:bodyPr/>
+          <a:p/>
+        </p:txBody>
       </p:sp>
       <p:pic>
         <p:nvPicPr>
@@ -5631,6 +7315,10 @@
             <a:prstDash val="solid"/>
           </a:ln>
         </p:spPr>
+        <p:txBody>
+          <a:bodyPr/>
+          <a:p/>
+        </p:txBody>
       </p:sp>
       <p:pic>
         <p:nvPicPr>
@@ -5683,13 +7371,13 @@
             <a:r>
               <a:rPr lang="en-US" sz="1200" b="1" dirty="0">
                 <a:solidFill>
-                  <a:srgbClr val="FFFFFF"/>
+                  <a:srgbClr val="FFC800"/>
                 </a:solidFill>
                 <a:latin typeface="Arial Black" pitchFamily="34" charset="0"/>
                 <a:ea typeface="Arial Black" pitchFamily="34" charset="-122"/>
                 <a:cs typeface="Arial Black" pitchFamily="34" charset="-120"/>
               </a:rPr>
-              <a:t>コンテキスト</a:t>
+              <a:t>★ コンテキスト</a:t>
             </a:r>
             <a:endParaRPr lang="en-US" sz="1200" dirty="0"/>
           </a:p>
@@ -5948,6 +7636,10 @@
             <a:prstDash val="solid"/>
           </a:ln>
         </p:spPr>
+        <p:txBody>
+          <a:bodyPr/>
+          <a:p/>
+        </p:txBody>
       </p:sp>
       <p:sp>
         <p:nvSpPr>
@@ -5982,7 +7674,7 @@
                 <a:ea typeface="Meiryo" pitchFamily="34" charset="-122"/>
                 <a:cs typeface="Meiryo" pitchFamily="34" charset="-120"/>
               </a:rPr>
-              <a:t>💡 </a:t>
+              <a:t>💡 Skills は「必要時のみ自動読込」でトークン効率が高い。 → 詳しくはFAQ Q1-1, Q2-1</a:t>
             </a:r>
             <a:pPr indent="0" marL="0">
               <a:buNone/>
@@ -5996,7 +7688,7 @@
                 <a:ea typeface="Meiryo" pitchFamily="34" charset="-122"/>
                 <a:cs typeface="Meiryo" pitchFamily="34" charset="-120"/>
               </a:rPr>
-              <a:t>Skills は追従性の階段で「助言的・自動読込」。CLAUDE.md より </a:t>
+              <a:t/>
             </a:r>
             <a:pPr indent="0" marL="0">
               <a:buNone/>
@@ -6010,7 +7702,7 @@
                 <a:ea typeface="Meiryo" pitchFamily="34" charset="-122"/>
                 <a:cs typeface="Meiryo" pitchFamily="34" charset="-120"/>
               </a:rPr>
-              <a:t>必要な時だけ読み込まれる</a:t>
+              <a:t/>
             </a:r>
             <a:pPr indent="0" marL="0">
               <a:buNone/>
@@ -6024,7 +7716,7 @@
                 <a:ea typeface="Meiryo" pitchFamily="34" charset="-122"/>
                 <a:cs typeface="Meiryo" pitchFamily="34" charset="-120"/>
               </a:rPr>
-              <a:t> のでトークン効率が良い</a:t>
+              <a:t/>
             </a:r>
             <a:endParaRPr lang="en-US" sz="1100" dirty="0"/>
           </a:p>
@@ -6077,7 +7769,7 @@
 </p:sld>
 </file>
 
-<file path=ppt/slides/slide4.xml><?xml version="1.0" encoding="utf-8"?>
+<file path=ppt/slides/slide5.xml><?xml version="1.0" encoding="utf-8"?>
 <p:sld xmlns:a="http://schemas.openxmlformats.org/drawingml/2006/main" xmlns:r="http://schemas.openxmlformats.org/officeDocument/2006/relationships" xmlns:p="http://schemas.openxmlformats.org/presentationml/2006/main">
   <p:cSld name="Slide 4">
     <p:bg>
@@ -6164,6 +7856,10 @@
             <a:prstDash val="solid"/>
           </a:ln>
         </p:spPr>
+        <p:txBody>
+          <a:bodyPr/>
+          <a:p/>
+        </p:txBody>
       </p:sp>
       <p:sp>
         <p:nvSpPr>
@@ -6228,6 +7924,10 @@
             <a:prstDash val="solid"/>
           </a:ln>
         </p:spPr>
+        <p:txBody>
+          <a:bodyPr/>
+          <a:p/>
+        </p:txBody>
       </p:sp>
       <p:sp>
         <p:nvSpPr>
@@ -6348,6 +8048,10 @@
             <a:prstDash val="solid"/>
           </a:ln>
         </p:spPr>
+        <p:txBody>
+          <a:bodyPr/>
+          <a:p/>
+        </p:txBody>
       </p:sp>
       <p:sp>
         <p:nvSpPr>
@@ -6468,6 +8172,10 @@
             <a:prstDash val="solid"/>
           </a:ln>
         </p:spPr>
+        <p:txBody>
+          <a:bodyPr/>
+          <a:p/>
+        </p:txBody>
       </p:sp>
       <p:sp>
         <p:nvSpPr>
@@ -6588,6 +8296,10 @@
             <a:prstDash val="solid"/>
           </a:ln>
         </p:spPr>
+        <p:txBody>
+          <a:bodyPr/>
+          <a:p/>
+        </p:txBody>
       </p:sp>
       <p:sp>
         <p:nvSpPr>
@@ -6669,6 +8381,10 @@
             <a:prstDash val="solid"/>
           </a:ln>
         </p:spPr>
+        <p:txBody>
+          <a:bodyPr/>
+          <a:p/>
+        </p:txBody>
       </p:sp>
       <p:sp>
         <p:nvSpPr>
@@ -6722,6 +8438,10 @@
             <a:prstDash val="solid"/>
           </a:ln>
         </p:spPr>
+        <p:txBody>
+          <a:bodyPr/>
+          <a:p/>
+        </p:txBody>
       </p:sp>
       <p:sp>
         <p:nvSpPr>
@@ -6786,6 +8506,10 @@
             <a:prstDash val="solid"/>
           </a:ln>
         </p:spPr>
+        <p:txBody>
+          <a:bodyPr/>
+          <a:p/>
+        </p:txBody>
       </p:sp>
       <p:sp>
         <p:nvSpPr>
@@ -6850,6 +8574,10 @@
             <a:prstDash val="solid"/>
           </a:ln>
         </p:spPr>
+        <p:txBody>
+          <a:bodyPr/>
+          <a:p/>
+        </p:txBody>
       </p:sp>
       <p:sp>
         <p:nvSpPr>
@@ -6914,6 +8642,10 @@
             <a:prstDash val="solid"/>
           </a:ln>
         </p:spPr>
+        <p:txBody>
+          <a:bodyPr/>
+          <a:p/>
+        </p:txBody>
       </p:sp>
       <p:sp>
         <p:nvSpPr>
@@ -6978,6 +8710,10 @@
             <a:prstDash val="solid"/>
           </a:ln>
         </p:spPr>
+        <p:txBody>
+          <a:bodyPr/>
+          <a:p/>
+        </p:txBody>
       </p:sp>
       <p:sp>
         <p:nvSpPr>
@@ -7042,6 +8778,10 @@
             <a:prstDash val="solid"/>
           </a:ln>
         </p:spPr>
+        <p:txBody>
+          <a:bodyPr/>
+          <a:p/>
+        </p:txBody>
       </p:sp>
       <p:sp>
         <p:nvSpPr>
@@ -7106,6 +8846,10 @@
             <a:prstDash val="solid"/>
           </a:ln>
         </p:spPr>
+        <p:txBody>
+          <a:bodyPr/>
+          <a:p/>
+        </p:txBody>
       </p:sp>
       <p:sp>
         <p:nvSpPr>
@@ -7170,6 +8914,10 @@
             <a:prstDash val="solid"/>
           </a:ln>
         </p:spPr>
+        <p:txBody>
+          <a:bodyPr/>
+          <a:p/>
+        </p:txBody>
       </p:sp>
       <p:sp>
         <p:nvSpPr>
@@ -7234,6 +8982,10 @@
             <a:prstDash val="solid"/>
           </a:ln>
         </p:spPr>
+        <p:txBody>
+          <a:bodyPr/>
+          <a:p/>
+        </p:txBody>
       </p:sp>
       <p:sp>
         <p:nvSpPr>
@@ -7298,6 +9050,10 @@
             <a:prstDash val="solid"/>
           </a:ln>
         </p:spPr>
+        <p:txBody>
+          <a:bodyPr/>
+          <a:p/>
+        </p:txBody>
       </p:sp>
       <p:sp>
         <p:nvSpPr>
@@ -7362,6 +9118,10 @@
             <a:prstDash val="solid"/>
           </a:ln>
         </p:spPr>
+        <p:txBody>
+          <a:bodyPr/>
+          <a:p/>
+        </p:txBody>
       </p:sp>
       <p:sp>
         <p:nvSpPr>
@@ -7426,6 +9186,10 @@
             <a:prstDash val="solid"/>
           </a:ln>
         </p:spPr>
+        <p:txBody>
+          <a:bodyPr/>
+          <a:p/>
+        </p:txBody>
       </p:sp>
       <p:sp>
         <p:nvSpPr>
@@ -7490,6 +9254,10 @@
             <a:prstDash val="solid"/>
           </a:ln>
         </p:spPr>
+        <p:txBody>
+          <a:bodyPr/>
+          <a:p/>
+        </p:txBody>
       </p:sp>
       <p:sp>
         <p:nvSpPr>
@@ -7554,6 +9322,10 @@
             <a:prstDash val="solid"/>
           </a:ln>
         </p:spPr>
+        <p:txBody>
+          <a:bodyPr/>
+          <a:p/>
+        </p:txBody>
       </p:sp>
       <p:sp>
         <p:nvSpPr>
@@ -7618,6 +9390,10 @@
             <a:prstDash val="solid"/>
           </a:ln>
         </p:spPr>
+        <p:txBody>
+          <a:bodyPr/>
+          <a:p/>
+        </p:txBody>
       </p:sp>
       <p:sp>
         <p:nvSpPr>
@@ -7722,7 +9498,7 @@
 </p:sld>
 </file>
 
-<file path=ppt/slides/slide5.xml><?xml version="1.0" encoding="utf-8"?>
+<file path=ppt/slides/slide6.xml><?xml version="1.0" encoding="utf-8"?>
 <p:sld xmlns:a="http://schemas.openxmlformats.org/drawingml/2006/main" xmlns:r="http://schemas.openxmlformats.org/officeDocument/2006/relationships" xmlns:p="http://schemas.openxmlformats.org/presentationml/2006/main">
   <p:cSld name="Slide 5">
     <p:bg>
@@ -7809,6 +9585,10 @@
             <a:prstDash val="solid"/>
           </a:ln>
         </p:spPr>
+        <p:txBody>
+          <a:bodyPr/>
+          <a:p/>
+        </p:txBody>
       </p:sp>
       <p:sp>
         <p:nvSpPr>
@@ -7873,6 +9653,10 @@
             <a:prstDash val="solid"/>
           </a:ln>
         </p:spPr>
+        <p:txBody>
+          <a:bodyPr/>
+          <a:p/>
+        </p:txBody>
       </p:sp>
       <p:sp>
         <p:nvSpPr>
@@ -8188,6 +9972,10 @@
             <a:prstDash val="solid"/>
           </a:ln>
         </p:spPr>
+        <p:txBody>
+          <a:bodyPr/>
+          <a:p/>
+        </p:txBody>
       </p:sp>
       <p:sp>
         <p:nvSpPr>
@@ -8213,6 +10001,10 @@
             <a:prstDash val="solid"/>
           </a:ln>
         </p:spPr>
+        <p:txBody>
+          <a:bodyPr/>
+          <a:p/>
+        </p:txBody>
       </p:sp>
       <p:sp>
         <p:nvSpPr>
@@ -8300,6 +10092,10 @@
             <a:prstDash val="solid"/>
           </a:ln>
         </p:spPr>
+        <p:txBody>
+          <a:bodyPr/>
+          <a:p/>
+        </p:txBody>
       </p:sp>
       <p:sp>
         <p:nvSpPr>
@@ -8403,6 +10199,10 @@
             <a:prstDash val="solid"/>
           </a:ln>
         </p:spPr>
+        <p:txBody>
+          <a:bodyPr/>
+          <a:p/>
+        </p:txBody>
       </p:sp>
       <p:sp>
         <p:nvSpPr>
@@ -8506,6 +10306,10 @@
             <a:prstDash val="solid"/>
           </a:ln>
         </p:spPr>
+        <p:txBody>
+          <a:bodyPr/>
+          <a:p/>
+        </p:txBody>
       </p:sp>
       <p:sp>
         <p:nvSpPr>
@@ -8609,6 +10413,10 @@
             <a:prstDash val="solid"/>
           </a:ln>
         </p:spPr>
+        <p:txBody>
+          <a:bodyPr/>
+          <a:p/>
+        </p:txBody>
       </p:sp>
       <p:sp>
         <p:nvSpPr>
@@ -8752,7 +10560,7 @@
 </p:sld>
 </file>
 
-<file path=ppt/slides/slide6.xml><?xml version="1.0" encoding="utf-8"?>
+<file path=ppt/slides/slide7.xml><?xml version="1.0" encoding="utf-8"?>
 <p:sld xmlns:a="http://schemas.openxmlformats.org/drawingml/2006/main" xmlns:r="http://schemas.openxmlformats.org/officeDocument/2006/relationships" xmlns:p="http://schemas.openxmlformats.org/presentationml/2006/main">
   <p:cSld name="Slide 6">
     <p:bg>
@@ -8839,6 +10647,10 @@
             <a:prstDash val="solid"/>
           </a:ln>
         </p:spPr>
+        <p:txBody>
+          <a:bodyPr/>
+          <a:p/>
+        </p:txBody>
       </p:sp>
       <p:sp>
         <p:nvSpPr>
@@ -8942,6 +10754,10 @@
             <a:prstDash val="solid"/>
           </a:ln>
         </p:spPr>
+        <p:txBody>
+          <a:bodyPr/>
+          <a:p/>
+        </p:txBody>
       </p:sp>
       <p:sp>
         <p:nvSpPr>
@@ -8967,6 +10783,10 @@
             <a:prstDash val="solid"/>
           </a:ln>
         </p:spPr>
+        <p:txBody>
+          <a:bodyPr/>
+          <a:p/>
+        </p:txBody>
       </p:sp>
       <p:sp>
         <p:nvSpPr>
@@ -9048,6 +10868,10 @@
             <a:prstDash val="solid"/>
           </a:ln>
         </p:spPr>
+        <p:txBody>
+          <a:bodyPr/>
+          <a:p/>
+        </p:txBody>
       </p:sp>
       <p:sp>
         <p:nvSpPr>
@@ -9151,6 +10975,10 @@
             <a:prstDash val="solid"/>
           </a:ln>
         </p:spPr>
+        <p:txBody>
+          <a:bodyPr/>
+          <a:p/>
+        </p:txBody>
       </p:sp>
       <p:sp>
         <p:nvSpPr>
@@ -9176,6 +11004,10 @@
             <a:prstDash val="solid"/>
           </a:ln>
         </p:spPr>
+        <p:txBody>
+          <a:bodyPr/>
+          <a:p/>
+        </p:txBody>
       </p:sp>
       <p:sp>
         <p:nvSpPr>
@@ -9240,6 +11072,10 @@
             <a:prstDash val="solid"/>
           </a:ln>
         </p:spPr>
+        <p:txBody>
+          <a:bodyPr/>
+          <a:p/>
+        </p:txBody>
       </p:sp>
       <p:sp>
         <p:nvSpPr>
@@ -9321,6 +11157,10 @@
             <a:prstDash val="solid"/>
           </a:ln>
         </p:spPr>
+        <p:txBody>
+          <a:bodyPr/>
+          <a:p/>
+        </p:txBody>
       </p:sp>
       <p:sp>
         <p:nvSpPr>
@@ -9402,6 +11242,10 @@
             <a:prstDash val="solid"/>
           </a:ln>
         </p:spPr>
+        <p:txBody>
+          <a:bodyPr/>
+          <a:p/>
+        </p:txBody>
       </p:sp>
       <p:sp>
         <p:nvSpPr>
@@ -9466,6 +11310,10 @@
             <a:prstDash val="solid"/>
           </a:ln>
         </p:spPr>
+        <p:txBody>
+          <a:bodyPr/>
+          <a:p/>
+        </p:txBody>
       </p:sp>
       <p:sp>
         <p:nvSpPr>
@@ -9530,6 +11378,10 @@
             <a:prstDash val="solid"/>
           </a:ln>
         </p:spPr>
+        <p:txBody>
+          <a:bodyPr/>
+          <a:p/>
+        </p:txBody>
       </p:sp>
       <p:sp>
         <p:nvSpPr>
@@ -9594,6 +11446,10 @@
             <a:prstDash val="solid"/>
           </a:ln>
         </p:spPr>
+        <p:txBody>
+          <a:bodyPr/>
+          <a:p/>
+        </p:txBody>
       </p:sp>
       <p:sp>
         <p:nvSpPr>
@@ -9681,7 +11537,7 @@
 </p:sld>
 </file>
 
-<file path=ppt/slides/slide7.xml><?xml version="1.0" encoding="utf-8"?>
+<file path=ppt/slides/slide8.xml><?xml version="1.0" encoding="utf-8"?>
 <p:sld xmlns:a="http://schemas.openxmlformats.org/drawingml/2006/main" xmlns:r="http://schemas.openxmlformats.org/officeDocument/2006/relationships" xmlns:p="http://schemas.openxmlformats.org/presentationml/2006/main">
   <p:cSld name="Slide 7">
     <p:bg>
@@ -9768,6 +11624,10 @@
             <a:prstDash val="solid"/>
           </a:ln>
         </p:spPr>
+        <p:txBody>
+          <a:bodyPr/>
+          <a:p/>
+        </p:txBody>
       </p:sp>
       <p:sp>
         <p:nvSpPr>
@@ -9832,6 +11692,10 @@
             <a:prstDash val="solid"/>
           </a:ln>
         </p:spPr>
+        <p:txBody>
+          <a:bodyPr/>
+          <a:p/>
+        </p:txBody>
       </p:sp>
       <p:sp>
         <p:nvSpPr>
@@ -9857,6 +11721,10 @@
             <a:prstDash val="solid"/>
           </a:ln>
         </p:spPr>
+        <p:txBody>
+          <a:bodyPr/>
+          <a:p/>
+        </p:txBody>
       </p:sp>
       <p:pic>
         <p:nvPicPr>
@@ -10051,6 +11919,10 @@
             <a:prstDash val="solid"/>
           </a:ln>
         </p:spPr>
+        <p:txBody>
+          <a:bodyPr/>
+          <a:p/>
+        </p:txBody>
       </p:sp>
       <p:sp>
         <p:nvSpPr>
@@ -10132,6 +12004,10 @@
             <a:prstDash val="solid"/>
           </a:ln>
         </p:spPr>
+        <p:txBody>
+          <a:bodyPr/>
+          <a:p/>
+        </p:txBody>
       </p:sp>
       <p:sp>
         <p:nvSpPr>
@@ -10157,6 +12033,10 @@
             <a:prstDash val="solid"/>
           </a:ln>
         </p:spPr>
+        <p:txBody>
+          <a:bodyPr/>
+          <a:p/>
+        </p:txBody>
       </p:sp>
       <p:pic>
         <p:nvPicPr>
@@ -10301,6 +12181,10 @@
             <a:prstDash val="solid"/>
           </a:ln>
         </p:spPr>
+        <p:txBody>
+          <a:bodyPr/>
+          <a:p/>
+        </p:txBody>
       </p:sp>
       <p:sp>
         <p:nvSpPr>
@@ -10442,7 +12326,7 @@
                 <a:ea typeface="Meiryo" pitchFamily="34" charset="-122"/>
                 <a:cs typeface="Meiryo" pitchFamily="34" charset="-120"/>
               </a:rPr>
-              <a:t>💡 第3回のsettings.jsonもPlugin化 → セキュリティ設定をチーム展開</a:t>
+              <a:t>→ 設定をチーム共有する方法は FAQ Q1-4 / 構造化ノート運用は Q3-3</a:t>
             </a:r>
             <a:endParaRPr lang="en-US" sz="1000" dirty="0"/>
           </a:p>
@@ -10472,6 +12356,10 @@
             <a:prstDash val="solid"/>
           </a:ln>
         </p:spPr>
+        <p:txBody>
+          <a:bodyPr/>
+          <a:p/>
+        </p:txBody>
       </p:sp>
       <p:sp>
         <p:nvSpPr>
@@ -10587,7 +12475,7 @@
 </p:sld>
 </file>
 
-<file path=ppt/slides/slide8.xml><?xml version="1.0" encoding="utf-8"?>
+<file path=ppt/slides/slide9.xml><?xml version="1.0" encoding="utf-8"?>
 <p:sld xmlns:a="http://schemas.openxmlformats.org/drawingml/2006/main" xmlns:r="http://schemas.openxmlformats.org/officeDocument/2006/relationships" xmlns:p="http://schemas.openxmlformats.org/presentationml/2006/main">
   <p:cSld name="Slide 8">
     <p:bg>
@@ -10674,6 +12562,10 @@
             <a:prstDash val="solid"/>
           </a:ln>
         </p:spPr>
+        <p:txBody>
+          <a:bodyPr/>
+          <a:p/>
+        </p:txBody>
       </p:sp>
       <p:sp>
         <p:nvSpPr>
@@ -10738,6 +12630,10 @@
             <a:prstDash val="solid"/>
           </a:ln>
         </p:spPr>
+        <p:txBody>
+          <a:bodyPr/>
+          <a:p/>
+        </p:txBody>
       </p:sp>
       <p:sp>
         <p:nvSpPr>
@@ -10763,6 +12659,10 @@
             <a:prstDash val="solid"/>
           </a:ln>
         </p:spPr>
+        <p:txBody>
+          <a:bodyPr/>
+          <a:p/>
+        </p:txBody>
       </p:sp>
       <p:sp>
         <p:nvSpPr>
@@ -10827,6 +12727,10 @@
             <a:prstDash val="solid"/>
           </a:ln>
         </p:spPr>
+        <p:txBody>
+          <a:bodyPr/>
+          <a:p/>
+        </p:txBody>
       </p:sp>
       <p:sp>
         <p:nvSpPr>
@@ -10965,6 +12869,10 @@
             <a:prstDash val="solid"/>
           </a:ln>
         </p:spPr>
+        <p:txBody>
+          <a:bodyPr/>
+          <a:p/>
+        </p:txBody>
       </p:sp>
       <p:sp>
         <p:nvSpPr>
@@ -11073,6 +12981,10 @@
             <a:prstDash val="solid"/>
           </a:ln>
         </p:spPr>
+        <p:txBody>
+          <a:bodyPr/>
+          <a:p/>
+        </p:txBody>
       </p:sp>
       <p:sp>
         <p:nvSpPr>
@@ -11098,6 +13010,10 @@
             <a:prstDash val="solid"/>
           </a:ln>
         </p:spPr>
+        <p:txBody>
+          <a:bodyPr/>
+          <a:p/>
+        </p:txBody>
       </p:sp>
       <p:sp>
         <p:nvSpPr>
@@ -11247,6 +13163,10 @@
             <a:prstDash val="solid"/>
           </a:ln>
         </p:spPr>
+        <p:txBody>
+          <a:bodyPr/>
+          <a:p/>
+        </p:txBody>
       </p:sp>
       <p:sp>
         <p:nvSpPr>
@@ -11402,6 +13322,10 @@
             <a:prstDash val="solid"/>
           </a:ln>
         </p:spPr>
+        <p:txBody>
+          <a:bodyPr/>
+          <a:p/>
+        </p:txBody>
       </p:sp>
       <p:sp>
         <p:nvSpPr>
@@ -11473,1170 +13397,6 @@
       <p:sp>
         <p:nvSpPr>
           <p:cNvPr id="20" name="Text 18"/>
-          <p:cNvSpPr/>
-          <p:nvPr/>
-        </p:nvSpPr>
-        <p:spPr>
-          <a:xfrm>
-            <a:off x="5486400" y="4828032"/>
-            <a:ext cx="3474720" cy="228600"/>
-          </a:xfrm>
-          <a:prstGeom prst="rect">
-            <a:avLst/>
-          </a:prstGeom>
-          <a:noFill/>
-          <a:ln/>
-        </p:spPr>
-        <p:txBody>
-          <a:bodyPr wrap="square" rtlCol="0" anchor="ctr"/>
-          <a:lstStyle/>
-          <a:p>
-            <a:pPr algn="r" indent="0" marL="0">
-              <a:buNone/>
-            </a:pPr>
-            <a:r>
-              <a:rPr lang="en-US" sz="1000" spc="100" kern="0" dirty="0">
-                <a:solidFill>
-                  <a:srgbClr val="64748B"/>
-                </a:solidFill>
-                <a:latin typeface="Arial" pitchFamily="34" charset="0"/>
-                <a:ea typeface="Arial" pitchFamily="34" charset="-122"/>
-                <a:cs typeface="Arial" pitchFamily="34" charset="-120"/>
-              </a:rPr>
-              <a:t>○ ○ ○ ● ○ ○ ○ ○ ○ ○</a:t>
-            </a:r>
-            <a:endParaRPr lang="en-US" sz="1000" dirty="0"/>
-          </a:p>
-        </p:txBody>
-      </p:sp>
-    </p:spTree>
-  </p:cSld>
-  <p:clrMapOvr>
-    <a:masterClrMapping/>
-  </p:clrMapOvr>
-</p:sld>
-</file>
-
-<file path=ppt/slides/slide9.xml><?xml version="1.0" encoding="utf-8"?>
-<p:sld xmlns:a="http://schemas.openxmlformats.org/drawingml/2006/main" xmlns:r="http://schemas.openxmlformats.org/officeDocument/2006/relationships" xmlns:p="http://schemas.openxmlformats.org/presentationml/2006/main">
-  <p:cSld name="Slide 9">
-    <p:bg>
-      <p:bgPr>
-        <a:solidFill>
-          <a:srgbClr val="FFFFFF"/>
-        </a:solidFill>
-      </p:bgPr>
-    </p:bg>
-    <p:spTree>
-      <p:nvGrpSpPr>
-        <p:cNvPr id="1" name=""/>
-        <p:cNvGrpSpPr/>
-        <p:nvPr/>
-      </p:nvGrpSpPr>
-      <p:grpSpPr>
-        <a:xfrm>
-          <a:off x="0" y="0"/>
-          <a:ext cx="0" cy="0"/>
-          <a:chOff x="0" y="0"/>
-          <a:chExt cx="0" cy="0"/>
-        </a:xfrm>
-      </p:grpSpPr>
-      <p:sp>
-        <p:nvSpPr>
-          <p:cNvPr id="2" name="Text 0"/>
-          <p:cNvSpPr/>
-          <p:nvPr/>
-        </p:nvSpPr>
-        <p:spPr>
-          <a:xfrm>
-            <a:off x="457200" y="320040"/>
-            <a:ext cx="8229600" cy="548640"/>
-          </a:xfrm>
-          <a:prstGeom prst="rect">
-            <a:avLst/>
-          </a:prstGeom>
-          <a:noFill/>
-          <a:ln/>
-        </p:spPr>
-        <p:txBody>
-          <a:bodyPr wrap="square" lIns="0" tIns="0" rIns="0" bIns="0" rtlCol="0" anchor="ctr"/>
-          <a:lstStyle/>
-          <a:p>
-            <a:pPr indent="0" marL="0">
-              <a:buNone/>
-            </a:pPr>
-            <a:r>
-              <a:rPr lang="en-US" sz="2000" b="1" dirty="0">
-                <a:solidFill>
-                  <a:srgbClr val="1E2761"/>
-                </a:solidFill>
-                <a:latin typeface="Arial Black" pitchFamily="34" charset="0"/>
-                <a:ea typeface="Arial Black" pitchFamily="34" charset="-122"/>
-                <a:cs typeface="Arial Black" pitchFamily="34" charset="-120"/>
-              </a:rPr>
-              <a:t>コンテキストエンジニアリング ― 戦略3: サブエージェント</a:t>
-            </a:r>
-            <a:endParaRPr lang="en-US" sz="2000" dirty="0"/>
-          </a:p>
-        </p:txBody>
-      </p:sp>
-      <p:sp>
-        <p:nvSpPr>
-          <p:cNvPr id="3" name="Shape 1"/>
-          <p:cNvSpPr/>
-          <p:nvPr/>
-        </p:nvSpPr>
-        <p:spPr>
-          <a:xfrm>
-            <a:off x="457200" y="932688"/>
-            <a:ext cx="548640" cy="45720"/>
-          </a:xfrm>
-          <a:prstGeom prst="rect">
-            <a:avLst/>
-          </a:prstGeom>
-          <a:solidFill>
-            <a:srgbClr val="F96167"/>
-          </a:solidFill>
-          <a:ln w="12700">
-            <a:solidFill>
-              <a:srgbClr val="F96167"/>
-            </a:solidFill>
-            <a:prstDash val="solid"/>
-          </a:ln>
-        </p:spPr>
-      </p:sp>
-      <p:sp>
-        <p:nvSpPr>
-          <p:cNvPr id="4" name="Text 2"/>
-          <p:cNvSpPr/>
-          <p:nvPr/>
-        </p:nvSpPr>
-        <p:spPr>
-          <a:xfrm>
-            <a:off x="457200" y="1051560"/>
-            <a:ext cx="8229600" cy="274320"/>
-          </a:xfrm>
-          <a:prstGeom prst="rect">
-            <a:avLst/>
-          </a:prstGeom>
-          <a:noFill/>
-          <a:ln/>
-        </p:spPr>
-        <p:txBody>
-          <a:bodyPr wrap="square" lIns="0" tIns="0" rIns="0" bIns="0" rtlCol="0" anchor="ctr"/>
-          <a:lstStyle/>
-          <a:p>
-            <a:pPr indent="0" marL="0">
-              <a:buNone/>
-            </a:pPr>
-            <a:r>
-              <a:rPr lang="en-US" sz="1300" i="1" dirty="0">
-                <a:solidFill>
-                  <a:srgbClr val="64748B"/>
-                </a:solidFill>
-                <a:latin typeface="Meiryo" pitchFamily="34" charset="0"/>
-                <a:ea typeface="Meiryo" pitchFamily="34" charset="-122"/>
-                <a:cs typeface="Meiryo" pitchFamily="34" charset="-120"/>
-              </a:rPr>
-              <a:t>独立したコンテキストウィンドウで並列作業。親の文脈を汚さない</a:t>
-            </a:r>
-            <a:endParaRPr lang="en-US" sz="1300" dirty="0"/>
-          </a:p>
-        </p:txBody>
-      </p:sp>
-      <p:sp>
-        <p:nvSpPr>
-          <p:cNvPr id="5" name="Shape 3"/>
-          <p:cNvSpPr/>
-          <p:nvPr/>
-        </p:nvSpPr>
-        <p:spPr>
-          <a:xfrm>
-            <a:off x="457200" y="1417320"/>
-            <a:ext cx="3931920" cy="2834640"/>
-          </a:xfrm>
-          <a:prstGeom prst="rect">
-            <a:avLst/>
-          </a:prstGeom>
-          <a:solidFill>
-            <a:srgbClr val="F8F9FC"/>
-          </a:solidFill>
-          <a:ln w="9525">
-            <a:solidFill>
-              <a:srgbClr val="E5E9F2"/>
-            </a:solidFill>
-            <a:prstDash val="solid"/>
-          </a:ln>
-        </p:spPr>
-      </p:sp>
-      <p:sp>
-        <p:nvSpPr>
-          <p:cNvPr id="6" name="Shape 4"/>
-          <p:cNvSpPr/>
-          <p:nvPr/>
-        </p:nvSpPr>
-        <p:spPr>
-          <a:xfrm>
-            <a:off x="457200" y="1417320"/>
-            <a:ext cx="3931920" cy="73152"/>
-          </a:xfrm>
-          <a:prstGeom prst="rect">
-            <a:avLst/>
-          </a:prstGeom>
-          <a:solidFill>
-            <a:srgbClr val="1E2761"/>
-          </a:solidFill>
-          <a:ln w="12700">
-            <a:solidFill>
-              <a:srgbClr val="1E2761"/>
-            </a:solidFill>
-            <a:prstDash val="solid"/>
-          </a:ln>
-        </p:spPr>
-      </p:sp>
-      <p:sp>
-        <p:nvSpPr>
-          <p:cNvPr id="7" name="Text 5"/>
-          <p:cNvSpPr/>
-          <p:nvPr/>
-        </p:nvSpPr>
-        <p:spPr>
-          <a:xfrm>
-            <a:off x="640080" y="1600200"/>
-            <a:ext cx="3566160" cy="320040"/>
-          </a:xfrm>
-          <a:prstGeom prst="rect">
-            <a:avLst/>
-          </a:prstGeom>
-          <a:noFill/>
-          <a:ln/>
-        </p:spPr>
-        <p:txBody>
-          <a:bodyPr wrap="square" lIns="0" tIns="0" rIns="0" bIns="0" rtlCol="0" anchor="ctr"/>
-          <a:lstStyle/>
-          <a:p>
-            <a:pPr indent="0" marL="0">
-              <a:buNone/>
-            </a:pPr>
-            <a:r>
-              <a:rPr lang="en-US" sz="1400" b="1" dirty="0">
-                <a:solidFill>
-                  <a:srgbClr val="1E2761"/>
-                </a:solidFill>
-                <a:latin typeface="Meiryo" pitchFamily="34" charset="0"/>
-                <a:ea typeface="Meiryo" pitchFamily="34" charset="-122"/>
-                <a:cs typeface="Meiryo" pitchFamily="34" charset="-120"/>
-              </a:rPr>
-              <a:t>仕組みと利点</a:t>
-            </a:r>
-            <a:endParaRPr lang="en-US" sz="1400" dirty="0"/>
-          </a:p>
-        </p:txBody>
-      </p:sp>
-      <p:sp>
-        <p:nvSpPr>
-          <p:cNvPr id="8" name="Text 6"/>
-          <p:cNvSpPr/>
-          <p:nvPr/>
-        </p:nvSpPr>
-        <p:spPr>
-          <a:xfrm>
-            <a:off x="640080" y="2011680"/>
-            <a:ext cx="3566160" cy="1371600"/>
-          </a:xfrm>
-          <a:prstGeom prst="rect">
-            <a:avLst/>
-          </a:prstGeom>
-          <a:noFill/>
-          <a:ln/>
-        </p:spPr>
-        <p:txBody>
-          <a:bodyPr wrap="square" lIns="0" tIns="0" rIns="0" bIns="0" rtlCol="0" anchor="t"/>
-          <a:lstStyle/>
-          <a:p>
-            <a:pPr marL="342900" indent="-342900">
-              <a:spcAft>
-                <a:spcPts val="600"/>
-              </a:spcAft>
-              <a:buSzPct val="100000"/>
-              <a:buChar char="■"/>
-            </a:pPr>
-            <a:r>
-              <a:rPr lang="en-US" sz="1100" dirty="0">
-                <a:solidFill>
-                  <a:srgbClr val="2D3748"/>
-                </a:solidFill>
-                <a:latin typeface="Meiryo" pitchFamily="34" charset="0"/>
-                <a:ea typeface="Meiryo" pitchFamily="34" charset="-122"/>
-                <a:cs typeface="Meiryo" pitchFamily="34" charset="-120"/>
-              </a:rPr>
-              <a:t>独立したコンテキストウィンドウで動作</a:t>
-            </a:r>
-            <a:endParaRPr lang="en-US" sz="1100" dirty="0"/>
-          </a:p>
-          <a:p>
-            <a:pPr marL="342900" indent="-342900">
-              <a:spcAft>
-                <a:spcPts val="600"/>
-              </a:spcAft>
-              <a:buSzPct val="100000"/>
-              <a:buChar char="■"/>
-            </a:pPr>
-            <a:r>
-              <a:rPr lang="en-US" sz="1100" dirty="0">
-                <a:solidFill>
-                  <a:srgbClr val="2D3748"/>
-                </a:solidFill>
-                <a:latin typeface="Meiryo" pitchFamily="34" charset="0"/>
-                <a:ea typeface="Meiryo" pitchFamily="34" charset="-122"/>
-                <a:cs typeface="Meiryo" pitchFamily="34" charset="-120"/>
-              </a:rPr>
-              <a:t>親エージェントのコンテキストに影響しない</a:t>
-            </a:r>
-            <a:endParaRPr lang="en-US" sz="1100" dirty="0"/>
-          </a:p>
-          <a:p>
-            <a:pPr marL="342900" indent="-342900">
-              <a:spcAft>
-                <a:spcPts val="600"/>
-              </a:spcAft>
-              <a:buSzPct val="100000"/>
-              <a:buChar char="■"/>
-            </a:pPr>
-            <a:r>
-              <a:rPr lang="en-US" sz="1100" dirty="0">
-                <a:solidFill>
-                  <a:srgbClr val="2D3748"/>
-                </a:solidFill>
-                <a:latin typeface="Meiryo" pitchFamily="34" charset="0"/>
-                <a:ea typeface="Meiryo" pitchFamily="34" charset="-122"/>
-                <a:cs typeface="Meiryo" pitchFamily="34" charset="-120"/>
-              </a:rPr>
-              <a:t>結果はファイル経由で親にレポート</a:t>
-            </a:r>
-            <a:endParaRPr lang="en-US" sz="1100" dirty="0"/>
-          </a:p>
-          <a:p>
-            <a:pPr marL="342900" indent="-342900">
-              <a:spcAft>
-                <a:spcPts val="600"/>
-              </a:spcAft>
-              <a:buSzPct val="100000"/>
-              <a:buChar char="■"/>
-            </a:pPr>
-            <a:r>
-              <a:rPr lang="en-US" sz="1100" dirty="0">
-                <a:solidFill>
-                  <a:srgbClr val="2D3748"/>
-                </a:solidFill>
-                <a:latin typeface="Meiryo" pitchFamily="34" charset="0"/>
-                <a:ea typeface="Meiryo" pitchFamily="34" charset="-122"/>
-                <a:cs typeface="Meiryo" pitchFamily="34" charset="-120"/>
-              </a:rPr>
-              <a:t>⚠ 実行単位でコンテキストを忘れる → ファイルで共有が必須</a:t>
-            </a:r>
-            <a:endParaRPr lang="en-US" sz="1100" dirty="0"/>
-          </a:p>
-        </p:txBody>
-      </p:sp>
-      <p:sp>
-        <p:nvSpPr>
-          <p:cNvPr id="9" name="Shape 7"/>
-          <p:cNvSpPr/>
-          <p:nvPr/>
-        </p:nvSpPr>
-        <p:spPr>
-          <a:xfrm>
-            <a:off x="731520" y="3429000"/>
-            <a:ext cx="3383280" cy="685800"/>
-          </a:xfrm>
-          <a:prstGeom prst="rect">
-            <a:avLst/>
-          </a:prstGeom>
-          <a:solidFill>
-            <a:srgbClr val="1E2761"/>
-          </a:solidFill>
-          <a:ln w="12700">
-            <a:solidFill>
-              <a:srgbClr val="1E2761"/>
-            </a:solidFill>
-            <a:prstDash val="solid"/>
-          </a:ln>
-        </p:spPr>
-      </p:sp>
-      <p:sp>
-        <p:nvSpPr>
-          <p:cNvPr id="10" name="Text 8"/>
-          <p:cNvSpPr/>
-          <p:nvPr/>
-        </p:nvSpPr>
-        <p:spPr>
-          <a:xfrm>
-            <a:off x="822960" y="3429000"/>
-            <a:ext cx="3200400" cy="685800"/>
-          </a:xfrm>
-          <a:prstGeom prst="rect">
-            <a:avLst/>
-          </a:prstGeom>
-          <a:noFill/>
-          <a:ln/>
-        </p:spPr>
-        <p:txBody>
-          <a:bodyPr wrap="square" lIns="0" tIns="0" rIns="0" bIns="0" rtlCol="0" anchor="ctr"/>
-          <a:lstStyle/>
-          <a:p>
-            <a:pPr algn="ctr" indent="0" marL="0">
-              <a:buNone/>
-            </a:pPr>
-            <a:r>
-              <a:rPr lang="en-US" sz="1100" dirty="0">
-                <a:solidFill>
-                  <a:srgbClr val="FFFFFF"/>
-                </a:solidFill>
-                <a:latin typeface="Meiryo" pitchFamily="34" charset="0"/>
-                <a:ea typeface="Meiryo" pitchFamily="34" charset="-122"/>
-                <a:cs typeface="Meiryo" pitchFamily="34" charset="-120"/>
-              </a:rPr>
-              <a:t>親 → サブエージェント → ファイル出力 → 親が読む</a:t>
-            </a:r>
-            <a:endParaRPr lang="en-US" sz="1100" dirty="0"/>
-          </a:p>
-        </p:txBody>
-      </p:sp>
-      <p:sp>
-        <p:nvSpPr>
-          <p:cNvPr id="11" name="Text 9"/>
-          <p:cNvSpPr/>
-          <p:nvPr/>
-        </p:nvSpPr>
-        <p:spPr>
-          <a:xfrm>
-            <a:off x="4754880" y="1417320"/>
-            <a:ext cx="3931920" cy="320040"/>
-          </a:xfrm>
-          <a:prstGeom prst="rect">
-            <a:avLst/>
-          </a:prstGeom>
-          <a:noFill/>
-          <a:ln/>
-        </p:spPr>
-        <p:txBody>
-          <a:bodyPr wrap="square" lIns="0" tIns="0" rIns="0" bIns="0" rtlCol="0" anchor="ctr"/>
-          <a:lstStyle/>
-          <a:p>
-            <a:pPr indent="0" marL="0">
-              <a:buNone/>
-            </a:pPr>
-            <a:r>
-              <a:rPr lang="en-US" sz="1400" b="1" dirty="0">
-                <a:solidFill>
-                  <a:srgbClr val="1E2761"/>
-                </a:solidFill>
-                <a:latin typeface="Meiryo" pitchFamily="34" charset="0"/>
-                <a:ea typeface="Meiryo" pitchFamily="34" charset="-122"/>
-                <a:cs typeface="Meiryo" pitchFamily="34" charset="-120"/>
-              </a:rPr>
-              <a:t>推奨パターン（用途別）</a:t>
-            </a:r>
-            <a:endParaRPr lang="en-US" sz="1400" dirty="0"/>
-          </a:p>
-        </p:txBody>
-      </p:sp>
-      <p:sp>
-        <p:nvSpPr>
-          <p:cNvPr id="12" name="Shape 10"/>
-          <p:cNvSpPr/>
-          <p:nvPr/>
-        </p:nvSpPr>
-        <p:spPr>
-          <a:xfrm>
-            <a:off x="4754880" y="1828800"/>
-            <a:ext cx="1371600" cy="365760"/>
-          </a:xfrm>
-          <a:prstGeom prst="rect">
-            <a:avLst/>
-          </a:prstGeom>
-          <a:solidFill>
-            <a:srgbClr val="1E2761"/>
-          </a:solidFill>
-          <a:ln w="12700">
-            <a:solidFill>
-              <a:srgbClr val="1E2761"/>
-            </a:solidFill>
-            <a:prstDash val="solid"/>
-          </a:ln>
-        </p:spPr>
-      </p:sp>
-      <p:sp>
-        <p:nvSpPr>
-          <p:cNvPr id="13" name="Text 11"/>
-          <p:cNvSpPr/>
-          <p:nvPr/>
-        </p:nvSpPr>
-        <p:spPr>
-          <a:xfrm>
-            <a:off x="4754880" y="1828800"/>
-            <a:ext cx="1371600" cy="365760"/>
-          </a:xfrm>
-          <a:prstGeom prst="rect">
-            <a:avLst/>
-          </a:prstGeom>
-          <a:noFill/>
-          <a:ln/>
-        </p:spPr>
-        <p:txBody>
-          <a:bodyPr wrap="square" lIns="0" tIns="0" rIns="0" bIns="0" rtlCol="0" anchor="ctr"/>
-          <a:lstStyle/>
-          <a:p>
-            <a:pPr algn="ctr" indent="0" marL="0">
-              <a:buNone/>
-            </a:pPr>
-            <a:r>
-              <a:rPr lang="en-US" sz="1000" b="1" dirty="0">
-                <a:solidFill>
-                  <a:srgbClr val="FFFFFF"/>
-                </a:solidFill>
-                <a:latin typeface="Meiryo" pitchFamily="34" charset="0"/>
-                <a:ea typeface="Meiryo" pitchFamily="34" charset="-122"/>
-                <a:cs typeface="Meiryo" pitchFamily="34" charset="-120"/>
-              </a:rPr>
-              <a:t>用途</a:t>
-            </a:r>
-            <a:endParaRPr lang="en-US" sz="1000" dirty="0"/>
-          </a:p>
-        </p:txBody>
-      </p:sp>
-      <p:sp>
-        <p:nvSpPr>
-          <p:cNvPr id="14" name="Shape 12"/>
-          <p:cNvSpPr/>
-          <p:nvPr/>
-        </p:nvSpPr>
-        <p:spPr>
-          <a:xfrm>
-            <a:off x="6126480" y="1828800"/>
-            <a:ext cx="2560320" cy="365760"/>
-          </a:xfrm>
-          <a:prstGeom prst="rect">
-            <a:avLst/>
-          </a:prstGeom>
-          <a:solidFill>
-            <a:srgbClr val="1E2761"/>
-          </a:solidFill>
-          <a:ln w="12700">
-            <a:solidFill>
-              <a:srgbClr val="1E2761"/>
-            </a:solidFill>
-            <a:prstDash val="solid"/>
-          </a:ln>
-        </p:spPr>
-      </p:sp>
-      <p:sp>
-        <p:nvSpPr>
-          <p:cNvPr id="15" name="Text 13"/>
-          <p:cNvSpPr/>
-          <p:nvPr/>
-        </p:nvSpPr>
-        <p:spPr>
-          <a:xfrm>
-            <a:off x="6126480" y="1828800"/>
-            <a:ext cx="2560320" cy="365760"/>
-          </a:xfrm>
-          <a:prstGeom prst="rect">
-            <a:avLst/>
-          </a:prstGeom>
-          <a:noFill/>
-          <a:ln/>
-        </p:spPr>
-        <p:txBody>
-          <a:bodyPr wrap="square" lIns="0" tIns="0" rIns="0" bIns="0" rtlCol="0" anchor="ctr"/>
-          <a:lstStyle/>
-          <a:p>
-            <a:pPr algn="ctr" indent="0" marL="0">
-              <a:buNone/>
-            </a:pPr>
-            <a:r>
-              <a:rPr lang="en-US" sz="1000" b="1" dirty="0">
-                <a:solidFill>
-                  <a:srgbClr val="FFFFFF"/>
-                </a:solidFill>
-                <a:latin typeface="Meiryo" pitchFamily="34" charset="0"/>
-                <a:ea typeface="Meiryo" pitchFamily="34" charset="-122"/>
-                <a:cs typeface="Meiryo" pitchFamily="34" charset="-120"/>
-              </a:rPr>
-              <a:t>サブエージェント例</a:t>
-            </a:r>
-            <a:endParaRPr lang="en-US" sz="1000" dirty="0"/>
-          </a:p>
-        </p:txBody>
-      </p:sp>
-      <p:sp>
-        <p:nvSpPr>
-          <p:cNvPr id="16" name="Shape 14"/>
-          <p:cNvSpPr/>
-          <p:nvPr/>
-        </p:nvSpPr>
-        <p:spPr>
-          <a:xfrm>
-            <a:off x="4754880" y="2194560"/>
-            <a:ext cx="1371600" cy="685800"/>
-          </a:xfrm>
-          <a:prstGeom prst="rect">
-            <a:avLst/>
-          </a:prstGeom>
-          <a:solidFill>
-            <a:srgbClr val="F8F9FC"/>
-          </a:solidFill>
-          <a:ln w="6350">
-            <a:solidFill>
-              <a:srgbClr val="E5E9F2"/>
-            </a:solidFill>
-            <a:prstDash val="solid"/>
-          </a:ln>
-        </p:spPr>
-      </p:sp>
-      <p:sp>
-        <p:nvSpPr>
-          <p:cNvPr id="17" name="Text 15"/>
-          <p:cNvSpPr/>
-          <p:nvPr/>
-        </p:nvSpPr>
-        <p:spPr>
-          <a:xfrm>
-            <a:off x="4846320" y="2194560"/>
-            <a:ext cx="1188720" cy="685800"/>
-          </a:xfrm>
-          <a:prstGeom prst="rect">
-            <a:avLst/>
-          </a:prstGeom>
-          <a:noFill/>
-          <a:ln/>
-        </p:spPr>
-        <p:txBody>
-          <a:bodyPr wrap="square" lIns="0" tIns="0" rIns="0" bIns="0" rtlCol="0" anchor="ctr"/>
-          <a:lstStyle/>
-          <a:p>
-            <a:pPr indent="0" marL="0">
-              <a:buNone/>
-            </a:pPr>
-            <a:r>
-              <a:rPr lang="en-US" sz="950" b="1" dirty="0">
-                <a:solidFill>
-                  <a:srgbClr val="2D3748"/>
-                </a:solidFill>
-                <a:latin typeface="Meiryo" pitchFamily="34" charset="0"/>
-                <a:ea typeface="Meiryo" pitchFamily="34" charset="-122"/>
-                <a:cs typeface="Meiryo" pitchFamily="34" charset="-120"/>
-              </a:rPr>
-              <a:t>成果物チェック</a:t>
-            </a:r>
-            <a:endParaRPr lang="en-US" sz="950" dirty="0"/>
-          </a:p>
-        </p:txBody>
-      </p:sp>
-      <p:sp>
-        <p:nvSpPr>
-          <p:cNvPr id="18" name="Shape 16"/>
-          <p:cNvSpPr/>
-          <p:nvPr/>
-        </p:nvSpPr>
-        <p:spPr>
-          <a:xfrm>
-            <a:off x="6126480" y="2194560"/>
-            <a:ext cx="2560320" cy="685800"/>
-          </a:xfrm>
-          <a:prstGeom prst="rect">
-            <a:avLst/>
-          </a:prstGeom>
-          <a:solidFill>
-            <a:srgbClr val="F8F9FC"/>
-          </a:solidFill>
-          <a:ln w="6350">
-            <a:solidFill>
-              <a:srgbClr val="E5E9F2"/>
-            </a:solidFill>
-            <a:prstDash val="solid"/>
-          </a:ln>
-        </p:spPr>
-      </p:sp>
-      <p:sp>
-        <p:nvSpPr>
-          <p:cNvPr id="19" name="Text 17"/>
-          <p:cNvSpPr/>
-          <p:nvPr/>
-        </p:nvSpPr>
-        <p:spPr>
-          <a:xfrm>
-            <a:off x="6217920" y="2194560"/>
-            <a:ext cx="2377440" cy="685800"/>
-          </a:xfrm>
-          <a:prstGeom prst="rect">
-            <a:avLst/>
-          </a:prstGeom>
-          <a:noFill/>
-          <a:ln/>
-        </p:spPr>
-        <p:txBody>
-          <a:bodyPr wrap="square" lIns="0" tIns="0" rIns="0" bIns="0" rtlCol="0" anchor="ctr"/>
-          <a:lstStyle/>
-          <a:p>
-            <a:pPr indent="0" marL="0">
-              <a:buNone/>
-            </a:pPr>
-            <a:r>
-              <a:rPr lang="en-US" sz="950" dirty="0">
-                <a:solidFill>
-                  <a:srgbClr val="2D3748"/>
-                </a:solidFill>
-                <a:latin typeface="Consolas" pitchFamily="34" charset="0"/>
-                <a:ea typeface="Consolas" pitchFamily="34" charset="-122"/>
-                <a:cs typeface="Consolas" pitchFamily="34" charset="-120"/>
-              </a:rPr>
-              <a:t>Code-Reviewer</a:t>
-            </a:r>
-            <a:endParaRPr lang="en-US" sz="950" dirty="0"/>
-          </a:p>
-          <a:p>
-            <a:pPr indent="0" marL="0">
-              <a:buNone/>
-            </a:pPr>
-            <a:r>
-              <a:rPr lang="en-US" sz="950" dirty="0">
-                <a:solidFill>
-                  <a:srgbClr val="2D3748"/>
-                </a:solidFill>
-                <a:latin typeface="Consolas" pitchFamily="34" charset="0"/>
-                <a:ea typeface="Consolas" pitchFamily="34" charset="-122"/>
-                <a:cs typeface="Consolas" pitchFamily="34" charset="-120"/>
-              </a:rPr>
-              <a:t>Test-Analyzer</a:t>
-            </a:r>
-            <a:endParaRPr lang="en-US" sz="950" dirty="0"/>
-          </a:p>
-          <a:p>
-            <a:pPr indent="0" marL="0">
-              <a:buNone/>
-            </a:pPr>
-            <a:r>
-              <a:rPr lang="en-US" sz="950" dirty="0">
-                <a:solidFill>
-                  <a:srgbClr val="2D3748"/>
-                </a:solidFill>
-                <a:latin typeface="Consolas" pitchFamily="34" charset="0"/>
-                <a:ea typeface="Consolas" pitchFamily="34" charset="-122"/>
-                <a:cs typeface="Consolas" pitchFamily="34" charset="-120"/>
-              </a:rPr>
-              <a:t>Security-Checker</a:t>
-            </a:r>
-            <a:endParaRPr lang="en-US" sz="950" dirty="0"/>
-          </a:p>
-        </p:txBody>
-      </p:sp>
-      <p:sp>
-        <p:nvSpPr>
-          <p:cNvPr id="20" name="Shape 18"/>
-          <p:cNvSpPr/>
-          <p:nvPr/>
-        </p:nvSpPr>
-        <p:spPr>
-          <a:xfrm>
-            <a:off x="4754880" y="2880360"/>
-            <a:ext cx="1371600" cy="685800"/>
-          </a:xfrm>
-          <a:prstGeom prst="rect">
-            <a:avLst/>
-          </a:prstGeom>
-          <a:solidFill>
-            <a:srgbClr val="FFFFFF"/>
-          </a:solidFill>
-          <a:ln w="6350">
-            <a:solidFill>
-              <a:srgbClr val="E5E9F2"/>
-            </a:solidFill>
-            <a:prstDash val="solid"/>
-          </a:ln>
-        </p:spPr>
-      </p:sp>
-      <p:sp>
-        <p:nvSpPr>
-          <p:cNvPr id="21" name="Text 19"/>
-          <p:cNvSpPr/>
-          <p:nvPr/>
-        </p:nvSpPr>
-        <p:spPr>
-          <a:xfrm>
-            <a:off x="4846320" y="2880360"/>
-            <a:ext cx="1188720" cy="685800"/>
-          </a:xfrm>
-          <a:prstGeom prst="rect">
-            <a:avLst/>
-          </a:prstGeom>
-          <a:noFill/>
-          <a:ln/>
-        </p:spPr>
-        <p:txBody>
-          <a:bodyPr wrap="square" lIns="0" tIns="0" rIns="0" bIns="0" rtlCol="0" anchor="ctr"/>
-          <a:lstStyle/>
-          <a:p>
-            <a:pPr indent="0" marL="0">
-              <a:buNone/>
-            </a:pPr>
-            <a:r>
-              <a:rPr lang="en-US" sz="950" b="1" dirty="0">
-                <a:solidFill>
-                  <a:srgbClr val="2D3748"/>
-                </a:solidFill>
-                <a:latin typeface="Meiryo" pitchFamily="34" charset="0"/>
-                <a:ea typeface="Meiryo" pitchFamily="34" charset="-122"/>
-                <a:cs typeface="Meiryo" pitchFamily="34" charset="-120"/>
-              </a:rPr>
-              <a:t>情報収集</a:t>
-            </a:r>
-            <a:endParaRPr lang="en-US" sz="950" dirty="0"/>
-          </a:p>
-        </p:txBody>
-      </p:sp>
-      <p:sp>
-        <p:nvSpPr>
-          <p:cNvPr id="22" name="Shape 20"/>
-          <p:cNvSpPr/>
-          <p:nvPr/>
-        </p:nvSpPr>
-        <p:spPr>
-          <a:xfrm>
-            <a:off x="6126480" y="2880360"/>
-            <a:ext cx="2560320" cy="685800"/>
-          </a:xfrm>
-          <a:prstGeom prst="rect">
-            <a:avLst/>
-          </a:prstGeom>
-          <a:solidFill>
-            <a:srgbClr val="FFFFFF"/>
-          </a:solidFill>
-          <a:ln w="6350">
-            <a:solidFill>
-              <a:srgbClr val="E5E9F2"/>
-            </a:solidFill>
-            <a:prstDash val="solid"/>
-          </a:ln>
-        </p:spPr>
-      </p:sp>
-      <p:sp>
-        <p:nvSpPr>
-          <p:cNvPr id="23" name="Text 21"/>
-          <p:cNvSpPr/>
-          <p:nvPr/>
-        </p:nvSpPr>
-        <p:spPr>
-          <a:xfrm>
-            <a:off x="6217920" y="2880360"/>
-            <a:ext cx="2377440" cy="685800"/>
-          </a:xfrm>
-          <a:prstGeom prst="rect">
-            <a:avLst/>
-          </a:prstGeom>
-          <a:noFill/>
-          <a:ln/>
-        </p:spPr>
-        <p:txBody>
-          <a:bodyPr wrap="square" lIns="0" tIns="0" rIns="0" bIns="0" rtlCol="0" anchor="ctr"/>
-          <a:lstStyle/>
-          <a:p>
-            <a:pPr indent="0" marL="0">
-              <a:buNone/>
-            </a:pPr>
-            <a:r>
-              <a:rPr lang="en-US" sz="950" dirty="0">
-                <a:solidFill>
-                  <a:srgbClr val="2D3748"/>
-                </a:solidFill>
-                <a:latin typeface="Consolas" pitchFamily="34" charset="0"/>
-                <a:ea typeface="Consolas" pitchFamily="34" charset="-122"/>
-                <a:cs typeface="Consolas" pitchFamily="34" charset="-120"/>
-              </a:rPr>
-              <a:t>Impact-Analyzer</a:t>
-            </a:r>
-            <a:endParaRPr lang="en-US" sz="950" dirty="0"/>
-          </a:p>
-          <a:p>
-            <a:pPr indent="0" marL="0">
-              <a:buNone/>
-            </a:pPr>
-            <a:r>
-              <a:rPr lang="en-US" sz="950" dirty="0">
-                <a:solidFill>
-                  <a:srgbClr val="2D3748"/>
-                </a:solidFill>
-                <a:latin typeface="Consolas" pitchFamily="34" charset="0"/>
-                <a:ea typeface="Consolas" pitchFamily="34" charset="-122"/>
-                <a:cs typeface="Consolas" pitchFamily="34" charset="-120"/>
-              </a:rPr>
-              <a:t>Dependency-Checker</a:t>
-            </a:r>
-            <a:endParaRPr lang="en-US" sz="950" dirty="0"/>
-          </a:p>
-          <a:p>
-            <a:pPr indent="0" marL="0">
-              <a:buNone/>
-            </a:pPr>
-            <a:r>
-              <a:rPr lang="en-US" sz="950" dirty="0">
-                <a:solidFill>
-                  <a:srgbClr val="2D3748"/>
-                </a:solidFill>
-                <a:latin typeface="Consolas" pitchFamily="34" charset="0"/>
-                <a:ea typeface="Consolas" pitchFamily="34" charset="-122"/>
-                <a:cs typeface="Consolas" pitchFamily="34" charset="-120"/>
-              </a:rPr>
-              <a:t>File-Finder</a:t>
-            </a:r>
-            <a:endParaRPr lang="en-US" sz="950" dirty="0"/>
-          </a:p>
-        </p:txBody>
-      </p:sp>
-      <p:sp>
-        <p:nvSpPr>
-          <p:cNvPr id="24" name="Shape 22"/>
-          <p:cNvSpPr/>
-          <p:nvPr/>
-        </p:nvSpPr>
-        <p:spPr>
-          <a:xfrm>
-            <a:off x="4754880" y="3566160"/>
-            <a:ext cx="1371600" cy="685800"/>
-          </a:xfrm>
-          <a:prstGeom prst="rect">
-            <a:avLst/>
-          </a:prstGeom>
-          <a:solidFill>
-            <a:srgbClr val="F8F9FC"/>
-          </a:solidFill>
-          <a:ln w="6350">
-            <a:solidFill>
-              <a:srgbClr val="E5E9F2"/>
-            </a:solidFill>
-            <a:prstDash val="solid"/>
-          </a:ln>
-        </p:spPr>
-      </p:sp>
-      <p:sp>
-        <p:nvSpPr>
-          <p:cNvPr id="25" name="Text 23"/>
-          <p:cNvSpPr/>
-          <p:nvPr/>
-        </p:nvSpPr>
-        <p:spPr>
-          <a:xfrm>
-            <a:off x="4846320" y="3566160"/>
-            <a:ext cx="1188720" cy="685800"/>
-          </a:xfrm>
-          <a:prstGeom prst="rect">
-            <a:avLst/>
-          </a:prstGeom>
-          <a:noFill/>
-          <a:ln/>
-        </p:spPr>
-        <p:txBody>
-          <a:bodyPr wrap="square" lIns="0" tIns="0" rIns="0" bIns="0" rtlCol="0" anchor="ctr"/>
-          <a:lstStyle/>
-          <a:p>
-            <a:pPr indent="0" marL="0">
-              <a:buNone/>
-            </a:pPr>
-            <a:r>
-              <a:rPr lang="en-US" sz="950" b="1" dirty="0">
-                <a:solidFill>
-                  <a:srgbClr val="2D3748"/>
-                </a:solidFill>
-                <a:latin typeface="Meiryo" pitchFamily="34" charset="0"/>
-                <a:ea typeface="Meiryo" pitchFamily="34" charset="-122"/>
-                <a:cs typeface="Meiryo" pitchFamily="34" charset="-120"/>
-              </a:rPr>
-              <a:t>大量処理</a:t>
-            </a:r>
-            <a:endParaRPr lang="en-US" sz="950" dirty="0"/>
-          </a:p>
-        </p:txBody>
-      </p:sp>
-      <p:sp>
-        <p:nvSpPr>
-          <p:cNvPr id="26" name="Shape 24"/>
-          <p:cNvSpPr/>
-          <p:nvPr/>
-        </p:nvSpPr>
-        <p:spPr>
-          <a:xfrm>
-            <a:off x="6126480" y="3566160"/>
-            <a:ext cx="2560320" cy="685800"/>
-          </a:xfrm>
-          <a:prstGeom prst="rect">
-            <a:avLst/>
-          </a:prstGeom>
-          <a:solidFill>
-            <a:srgbClr val="F8F9FC"/>
-          </a:solidFill>
-          <a:ln w="6350">
-            <a:solidFill>
-              <a:srgbClr val="E5E9F2"/>
-            </a:solidFill>
-            <a:prstDash val="solid"/>
-          </a:ln>
-        </p:spPr>
-      </p:sp>
-      <p:sp>
-        <p:nvSpPr>
-          <p:cNvPr id="27" name="Text 25"/>
-          <p:cNvSpPr/>
-          <p:nvPr/>
-        </p:nvSpPr>
-        <p:spPr>
-          <a:xfrm>
-            <a:off x="6217920" y="3566160"/>
-            <a:ext cx="2377440" cy="685800"/>
-          </a:xfrm>
-          <a:prstGeom prst="rect">
-            <a:avLst/>
-          </a:prstGeom>
-          <a:noFill/>
-          <a:ln/>
-        </p:spPr>
-        <p:txBody>
-          <a:bodyPr wrap="square" lIns="0" tIns="0" rIns="0" bIns="0" rtlCol="0" anchor="ctr"/>
-          <a:lstStyle/>
-          <a:p>
-            <a:pPr indent="0" marL="0">
-              <a:buNone/>
-            </a:pPr>
-            <a:r>
-              <a:rPr lang="en-US" sz="950" dirty="0">
-                <a:solidFill>
-                  <a:srgbClr val="2D3748"/>
-                </a:solidFill>
-                <a:latin typeface="Consolas" pitchFamily="34" charset="0"/>
-                <a:ea typeface="Consolas" pitchFamily="34" charset="-122"/>
-                <a:cs typeface="Consolas" pitchFamily="34" charset="-120"/>
-              </a:rPr>
-              <a:t>Test-Runner</a:t>
-            </a:r>
-            <a:endParaRPr lang="en-US" sz="950" dirty="0"/>
-          </a:p>
-          <a:p>
-            <a:pPr indent="0" marL="0">
-              <a:buNone/>
-            </a:pPr>
-            <a:r>
-              <a:rPr lang="en-US" sz="950" dirty="0">
-                <a:solidFill>
-                  <a:srgbClr val="2D3748"/>
-                </a:solidFill>
-                <a:latin typeface="Consolas" pitchFamily="34" charset="0"/>
-                <a:ea typeface="Consolas" pitchFamily="34" charset="-122"/>
-                <a:cs typeface="Consolas" pitchFamily="34" charset="-120"/>
-              </a:rPr>
-              <a:t>Build-Executor</a:t>
-            </a:r>
-            <a:endParaRPr lang="en-US" sz="950" dirty="0"/>
-          </a:p>
-          <a:p>
-            <a:pPr indent="0" marL="0">
-              <a:buNone/>
-            </a:pPr>
-            <a:r>
-              <a:rPr lang="en-US" sz="950" dirty="0">
-                <a:solidFill>
-                  <a:srgbClr val="2D3748"/>
-                </a:solidFill>
-                <a:latin typeface="Consolas" pitchFamily="34" charset="0"/>
-                <a:ea typeface="Consolas" pitchFamily="34" charset="-122"/>
-                <a:cs typeface="Consolas" pitchFamily="34" charset="-120"/>
-              </a:rPr>
-              <a:t>Log-Analyzer</a:t>
-            </a:r>
-            <a:endParaRPr lang="en-US" sz="950" dirty="0"/>
-          </a:p>
-        </p:txBody>
-      </p:sp>
-      <p:sp>
-        <p:nvSpPr>
-          <p:cNvPr id="28" name="Shape 26"/>
-          <p:cNvSpPr/>
-          <p:nvPr/>
-        </p:nvSpPr>
-        <p:spPr>
-          <a:xfrm>
-            <a:off x="457200" y="4434840"/>
-            <a:ext cx="8229600" cy="365760"/>
-          </a:xfrm>
-          <a:prstGeom prst="rect">
-            <a:avLst/>
-          </a:prstGeom>
-          <a:solidFill>
-            <a:srgbClr val="151B47"/>
-          </a:solidFill>
-          <a:ln w="12700">
-            <a:solidFill>
-              <a:srgbClr val="151B47"/>
-            </a:solidFill>
-            <a:prstDash val="solid"/>
-          </a:ln>
-        </p:spPr>
-      </p:sp>
-      <p:sp>
-        <p:nvSpPr>
-          <p:cNvPr id="29" name="Text 27"/>
-          <p:cNvSpPr/>
-          <p:nvPr/>
-        </p:nvSpPr>
-        <p:spPr>
-          <a:xfrm>
-            <a:off x="594360" y="4434840"/>
-            <a:ext cx="7955280" cy="365760"/>
-          </a:xfrm>
-          <a:prstGeom prst="rect">
-            <a:avLst/>
-          </a:prstGeom>
-          <a:noFill/>
-          <a:ln/>
-        </p:spPr>
-        <p:txBody>
-          <a:bodyPr wrap="square" lIns="0" tIns="0" rIns="0" bIns="0" rtlCol="0" anchor="ctr"/>
-          <a:lstStyle/>
-          <a:p>
-            <a:pPr indent="0" marL="0">
-              <a:buNone/>
-            </a:pPr>
-            <a:r>
-              <a:rPr lang="en-US" sz="1200" dirty="0">
-                <a:solidFill>
-                  <a:srgbClr val="FFFFFF"/>
-                </a:solidFill>
-                <a:latin typeface="Meiryo" pitchFamily="34" charset="0"/>
-                <a:ea typeface="Meiryo" pitchFamily="34" charset="-122"/>
-                <a:cs typeface="Meiryo" pitchFamily="34" charset="-120"/>
-              </a:rPr>
-              <a:t>💡 </a:t>
-            </a:r>
-            <a:pPr indent="0" marL="0">
-              <a:buNone/>
-            </a:pPr>
-            <a:r>
-              <a:rPr lang="en-US" sz="1100" dirty="0">
-                <a:solidFill>
-                  <a:srgbClr val="CADCFC"/>
-                </a:solidFill>
-                <a:latin typeface="Meiryo" pitchFamily="34" charset="0"/>
-                <a:ea typeface="Meiryo" pitchFamily="34" charset="-122"/>
-                <a:cs typeface="Meiryo" pitchFamily="34" charset="-120"/>
-              </a:rPr>
-              <a:t>サブエージェントの詳細は第8回「Agent Teams」で本格展開</a:t>
-            </a:r>
-            <a:endParaRPr lang="en-US" sz="1100" dirty="0"/>
-          </a:p>
-        </p:txBody>
-      </p:sp>
-      <p:sp>
-        <p:nvSpPr>
-          <p:cNvPr id="30" name="Text 28"/>
           <p:cNvSpPr/>
           <p:nvPr/>
         </p:nvSpPr>
